--- a/examples/SATS/SATS_ASA_Pitch_Submission.pptx
+++ b/examples/SATS/SATS_ASA_Pitch_Submission.pptx
@@ -332,10 +332,10 @@
                 <c:formatCode>0</c:formatCode>
                 <c:ptCount val="2"/>
                 <c:pt idx="0">
-                  <c:v>42.3</c:v>
+                  <c:v>39.75</c:v>
                 </c:pt>
                 <c:pt idx="1">
-                  <c:v>54.26383208169154</c:v>
+                  <c:v>50.70726461760232</c:v>
                 </c:pt>
               </c:numCache>
             </c:numRef>
@@ -401,7 +401,7 @@
       <c:valAx>
         <c:axId val="-2113994440"/>
         <c:scaling>
-          <c:max val="73.25617331028359"/>
+          <c:max val="68.45480723376313"/>
           <c:min val="0.0"/>
         </c:scaling>
         <c:delete val="0"/>
@@ -673,13 +673,13 @@
                   <c:v>5509</c:v>
                 </c:pt>
                 <c:pt idx="3">
-                  <c:v>5750.541690499999</c:v>
+                  <c:v>5664.776144193548</c:v>
                 </c:pt>
                 <c:pt idx="4">
-                  <c:v>6082.098720965473</c:v>
+                  <c:v>5951.562543583052</c:v>
                 </c:pt>
                 <c:pt idx="5">
-                  <c:v>6469.304083602022</c:v>
+                  <c:v>6301.068243984994</c:v>
                 </c:pt>
               </c:numCache>
             </c:numRef>
@@ -747,13 +747,13 @@
                   <c:v>647</c:v>
                 </c:pt>
                 <c:pt idx="3">
-                  <c:v>756.474970112617</c:v>
+                  <c:v>719.1208456165834</c:v>
                 </c:pt>
                 <c:pt idx="4">
-                  <c:v>837.9352622602976</c:v>
+                  <c:v>796.7195650163045</c:v>
                 </c:pt>
                 <c:pt idx="5">
-                  <c:v>915.9335891910907</c:v>
+                  <c:v>864.4347466986234</c:v>
                 </c:pt>
               </c:numCache>
             </c:numRef>
@@ -894,13 +894,13 @@
                   <c:v>0.1174441822472318</c:v>
                 </c:pt>
                 <c:pt idx="3">
-                  <c:v>0.13154847157483052</c:v>
+                  <c:v>0.1269460305776936</c:v>
                 </c:pt>
                 <c:pt idx="4">
-                  <c:v>0.137770743406691</c:v>
+                  <c:v>0.13386729269531478</c:v>
                 </c:pt>
                 <c:pt idx="5">
-                  <c:v>0.14158147110641167</c:v>
+                  <c:v>0.1371886025078071</c:v>
                 </c:pt>
               </c:numCache>
             </c:numRef>
@@ -947,7 +947,7 @@
       <c:valAx>
         <c:axId val="-2113994440"/>
         <c:scaling>
-          <c:max val="10027.421329583134"/>
+          <c:max val="9766.65577817674"/>
           <c:min val="0.0"/>
         </c:scaling>
         <c:delete val="0"/>
@@ -993,8 +993,8 @@
         <c:axId val="900002"/>
         <c:scaling>
           <c:orientation val="minMax"/>
-          <c:max val="0.1936"/>
-          <c:min val="-0.3262"/>
+          <c:max val="0.1855"/>
+          <c:min val="-0.2976"/>
         </c:scaling>
         <c:delete val="0"/>
         <c:axPos val="r"/>
@@ -2050,19 +2050,19 @@
                   <c:v>0.004372959985332122</c:v>
                 </c:pt>
                 <c:pt idx="3">
-                  <c:v>0.0025148242270224583</c:v>
+                  <c:v>-0.010889804952599553</c:v>
                 </c:pt>
                 <c:pt idx="4">
-                  <c:v>0.014342592032979901</c:v>
+                  <c:v>0.009247666668338544</c:v>
                 </c:pt>
                 <c:pt idx="5">
-                  <c:v>0.025703217294839275</c:v>
+                  <c:v>0.020946737057646842</c:v>
                 </c:pt>
                 <c:pt idx="6">
-                  <c:v>0.029077146894767904</c:v>
+                  <c:v>0.026890287652547206</c:v>
                 </c:pt>
                 <c:pt idx="7">
-                  <c:v>0.02803770653989851</c:v>
+                  <c:v>0.027916168435016157</c:v>
                 </c:pt>
               </c:numCache>
             </c:numRef>
@@ -2139,19 +2139,19 @@
                   <c:v>0.025435466725318545</c:v>
                 </c:pt>
                 <c:pt idx="3">
-                  <c:v>0.009668197495008175</c:v>
+                  <c:v>0.009562147570837162</c:v>
                 </c:pt>
                 <c:pt idx="4">
-                  <c:v>0.009503775778117066</c:v>
+                  <c:v>0.009451804910877404</c:v>
                 </c:pt>
                 <c:pt idx="5">
-                  <c:v>0.007965939170458795</c:v>
+                  <c:v>0.007901107817455837</c:v>
                 </c:pt>
                 <c:pt idx="6">
-                  <c:v>0.006411017482550234</c:v>
+                  <c:v>0.0063678828101061714</c:v>
                 </c:pt>
                 <c:pt idx="7">
-                  <c:v>0.0050254711384893</c:v>
+                  <c:v>0.00499508261057759</c:v>
                 </c:pt>
               </c:numCache>
             </c:numRef>
@@ -2225,19 +2225,19 @@
                   <c:v>0.05806677076170328</c:v>
                 </c:pt>
                 <c:pt idx="3">
-                  <c:v>0.031661903037453684</c:v>
+                  <c:v>0.02960432178429424</c:v>
                 </c:pt>
                 <c:pt idx="4">
-                  <c:v>0.03381029278023682</c:v>
+                  <c:v>0.03192678303165028</c:v>
                 </c:pt>
                 <c:pt idx="5">
-                  <c:v>0.029993960560708396</c:v>
+                  <c:v>0.02987718705433211</c:v>
                 </c:pt>
                 <c:pt idx="6">
-                  <c:v>0.028384385516544902</c:v>
+                  <c:v>0.027294989526917182</c:v>
                 </c:pt>
                 <c:pt idx="7">
-                  <c:v>0.025826579441959686</c:v>
+                  <c:v>0.02582278127613983</c:v>
                 </c:pt>
               </c:numCache>
             </c:numRef>
@@ -2445,28 +2445,28 @@
                   <c:v>5509</c:v>
                 </c:pt>
                 <c:pt idx="1">
-                  <c:v>5617.298318548387</c:v>
+                  <c:v>5548.323359778226</c:v>
                 </c:pt>
                 <c:pt idx="2">
-                  <c:v>5801.902039370527</c:v>
+                  <c:v>5751.0678306202735</c:v>
                 </c:pt>
                 <c:pt idx="3">
-                  <c:v>6011.467429338461</c:v>
+                  <c:v>5982.720740450366</c:v>
                 </c:pt>
                 <c:pt idx="4">
-                  <c:v>6226.125094364175</c:v>
+                  <c:v>6223.848456806224</c:v>
                 </c:pt>
                 <c:pt idx="5">
-                  <c:v>6419.623922281015</c:v>
+                  <c:v>6463.08875114741</c:v>
                 </c:pt>
                 <c:pt idx="6">
-                  <c:v>6582.49675575214</c:v>
+                  <c:v>6687.249241394905</c:v>
                 </c:pt>
                 <c:pt idx="7">
-                  <c:v>6716.682939377195</c:v>
+                  <c:v>6886.9341113464425</c:v>
                 </c:pt>
                 <c:pt idx="8">
-                  <c:v>6837.090882632527</c:v>
+                  <c:v>7070.142263249492</c:v>
                 </c:pt>
               </c:numCache>
             </c:numRef>
@@ -2542,28 +2542,28 @@
                   <c:v>5509</c:v>
                 </c:pt>
                 <c:pt idx="1">
-                  <c:v>5750.541690499999</c:v>
+                  <c:v>5664.776144193548</c:v>
                 </c:pt>
                 <c:pt idx="2">
-                  <c:v>6082.098720965473</c:v>
+                  <c:v>5951.562543583052</c:v>
                 </c:pt>
                 <c:pt idx="3">
-                  <c:v>6469.304083602022</c:v>
+                  <c:v>6301.068243984994</c:v>
                 </c:pt>
                 <c:pt idx="4">
-                  <c:v>6882.515031460463</c:v>
+                  <c:v>6682.61783746822</c:v>
                 </c:pt>
                 <c:pt idx="5">
-                  <c:v>7287.8246700403115</c:v>
+                  <c:v>7075.114929527872</c:v>
                 </c:pt>
                 <c:pt idx="6">
-                  <c:v>7672.770438958042</c:v>
+                  <c:v>7461.3323226919265</c:v>
                 </c:pt>
                 <c:pt idx="7">
-                  <c:v>8038.062195854581</c:v>
+                  <c:v>7830.90421859966</c:v>
                 </c:pt>
                 <c:pt idx="8">
-                  <c:v>8399.49812471518</c:v>
+                  <c:v>8191.960788490563</c:v>
                 </c:pt>
               </c:numCache>
             </c:numRef>
@@ -2639,28 +2639,28 @@
                   <c:v>5509</c:v>
                 </c:pt>
                 <c:pt idx="1">
-                  <c:v>5843.303124703631</c:v>
+                  <c:v>5768.707637499999</c:v>
                 </c:pt>
                 <c:pt idx="2">
-                  <c:v>6305.526535051016</c:v>
+                  <c:v>6127.396670680786</c:v>
                 </c:pt>
                 <c:pt idx="3">
-                  <c:v>6853.6773334616855</c:v>
+                  <c:v>6584.096253590093</c:v>
                 </c:pt>
                 <c:pt idx="4">
-                  <c:v>7449.828622446995</c:v>
+                  <c:v>7097.5683312173205</c:v>
                 </c:pt>
                 <c:pt idx="5">
-                  <c:v>8055.507126494461</c:v>
+                  <c:v>7637.239965595425</c:v>
                 </c:pt>
                 <c:pt idx="6">
-                  <c:v>8657.611188198913</c:v>
+                  <c:v>8182.2286182482885</c:v>
                 </c:pt>
                 <c:pt idx="7">
-                  <c:v>9256.608335004734</c:v>
+                  <c:v>8721.753937651452</c:v>
                 </c:pt>
                 <c:pt idx="8">
-                  <c:v>9869.742850069655</c:v>
+                  <c:v>9264.420626901907</c:v>
                 </c:pt>
               </c:numCache>
             </c:numRef>
@@ -2856,22 +2856,22 @@
                 <c:formatCode>#,##0</c:formatCode>
                 <c:ptCount val="6"/>
                 <c:pt idx="0">
-                  <c:v>24.950000000000003</c:v>
+                  <c:v>14.950000000000003</c:v>
                 </c:pt>
                 <c:pt idx="1">
-                  <c:v>39.323391322778825</c:v>
+                  <c:v>26.081103334703812</c:v>
                 </c:pt>
                 <c:pt idx="2">
-                  <c:v>4.636553115633351</c:v>
+                  <c:v>7.73834004770794</c:v>
                 </c:pt>
                 <c:pt idx="3">
-                  <c:v>33.95676211817794</c:v>
+                  <c:v>22.178412291840196</c:v>
                 </c:pt>
                 <c:pt idx="4">
-                  <c:v>37.1920030937855</c:v>
+                  <c:v>24.968671660764386</c:v>
                 </c:pt>
                 <c:pt idx="5">
-                  <c:v>33.32877208554522</c:v>
+                  <c:v>21.66961431435881</c:v>
                 </c:pt>
               </c:numCache>
             </c:numRef>
@@ -2933,19 +2933,19 @@
                   <c:v>12.5</c:v>
                 </c:pt>
                 <c:pt idx="1">
-                  <c:v>11.015505880986048</c:v>
+                  <c:v>10.307688221745856</c:v>
                 </c:pt>
                 <c:pt idx="2">
-                  <c:v>76.8782715953057</c:v>
+                  <c:v>46.031521344109024</c:v>
                 </c:pt>
                 <c:pt idx="3">
-                  <c:v>12.8318069428664</c:v>
+                  <c:v>12.382927958101682</c:v>
                 </c:pt>
                 <c:pt idx="4">
-                  <c:v>26.8070104541478</c:v>
+                  <c:v>25.700631129558204</c:v>
                 </c:pt>
                 <c:pt idx="5">
-                  <c:v>19.257232038020092</c:v>
+                  <c:v>18.51982858415947</c:v>
                 </c:pt>
               </c:numCache>
             </c:numRef>
@@ -2990,7 +2990,7 @@
       <c:valAx>
         <c:axId val="-2113994440"/>
         <c:scaling>
-          <c:max val="89.66630718203297"/>
+          <c:max val="59.14684753099866"/>
           <c:min val="0.0"/>
         </c:scaling>
         <c:delete val="0"/>
@@ -3440,7 +3440,7 @@
           <a:p/>
           <a:p>
             <a:r>
-              <a:t>TALKING POINT: One sentence on who we are and our recommendation: 'We recommend BUY with a target price of NOK 57.'</a:t>
+              <a:t>TALKING POINT: One sentence on who we are and our recommendation: 'We recommend BUY with a target price of NOK 54.'</a:t>
             </a:r>
           </a:p>
         </p:txBody>
@@ -3820,7 +3820,7 @@
           <a:p/>
           <a:p>
             <a:r>
-              <a:t>TALKING POINTS: (1) Recommendation and target price first. (2) DCF: NOK 54 with WACC 9.0% and g 2.0%; 34 of 35 cells in the sensitivity grid are above today's price (the value falls below it only at a WACC of 10.5% or more). (3) What the market prices in: an EBIT margin of 12.7% in 2033E vs. our 15.6% – the debate is margins. (4) Peers confirm the gap; target price = blend rolled forward 12 months. (5) Close with the risk/reward: bear vs. bull.</a:t>
+              <a:t>TALKING POINTS: (1) Recommendation and target price first. (2) DCF: NOK 51 with WACC 9.1% and g 2.0%; 34 of 35 cells in the sensitivity grid are above today's price (the value falls below it only at a WACC of 10.6% or more). (3) What the market prices in: an EBIT margin of 12.3% in 2033E vs. our 15.1% – the debate is margins. (4) Peers confirm the gap; target price = blend rolled forward 12 months. (5) Close with the risk/reward: bear vs. bull.</a:t>
             </a:r>
           </a:p>
         </p:txBody>
@@ -7041,7 +7041,7 @@
                 </a:solidFill>
                 <a:latin typeface="Arial"/>
               </a:rPr>
-              <a:t>Share price and estimates as of 30.09.26</a:t>
+              <a:t>Share price and estimates as of 06.10.26</a:t>
             </a:r>
             <a:endParaRPr sz="1200"/>
           </a:p>
@@ -8704,7 +8704,7 @@
                 </a:solidFill>
                 <a:latin typeface="Arial"/>
               </a:rPr>
-              <a:t>EBIT adj. margin to ~15% by 2030E</a:t>
+              <a:t>EBIT adj. margin to ~14% by 2030E</a:t>
             </a:r>
             <a:r>
               <a:rPr sz="1100" b="0" i="0">
@@ -9394,7 +9394,7 @@
                           </a:solidFill>
                           <a:latin typeface="Arial"/>
                         </a:rPr>
-                        <a:t>8,151</a:t>
+                        <a:t>7,596</a:t>
                       </a:r>
                       <a:endParaRPr sz="950"/>
                     </a:p>
@@ -9464,7 +9464,7 @@
                           </a:solidFill>
                           <a:latin typeface="Arial"/>
                         </a:rPr>
-                        <a:t>9,228</a:t>
+                        <a:t>8,673</a:t>
                       </a:r>
                       <a:endParaRPr sz="950"/>
                     </a:p>
@@ -9736,7 +9736,7 @@
                 </a:solidFill>
                 <a:latin typeface="Arial"/>
               </a:rPr>
-              <a:t> revenue per member up ~6% a year in 2024-25 while the member base grew</a:t>
+              <a:t> revenue per member up ~6% a year in 2024-25 and +6% currency adjusted in Q2 2026</a:t>
             </a:r>
             <a:endParaRPr sz="950"/>
           </a:p>
@@ -9768,7 +9768,7 @@
                 </a:solidFill>
                 <a:latin typeface="Arial"/>
               </a:rPr>
-              <a:t> EBITDA before IFRS 16 up from NOK 0.61bn (2023) to NOK 0.87bn (2025)</a:t>
+              <a:t> EBITDA before IFRS 16 up from NOK 0.61bn (2023) to NOK 0.87bn (2025) and NOK 0.95bn LTM</a:t>
             </a:r>
             <a:endParaRPr sz="950"/>
           </a:p>
@@ -11862,7 +11862,43 @@
                           </a:solidFill>
                           <a:latin typeface="Arial"/>
                         </a:rPr>
-                        <a:t>39.2%</a:t>
+                        <a:t>38.9%</a:t>
+                      </a:r>
+                      <a:endParaRPr sz="850"/>
+                    </a:p>
+                  </a:txBody>
+                  <a:tcPr marL="36576" marR="36576" marT="0" marB="0" anchor="ctr">
+                    <a:lnL w="9525" cap="flat" cmpd="sng" algn="ctr">
+                      <a:noFill/>
+                    </a:lnL>
+                    <a:lnR w="9525" cap="flat" cmpd="sng" algn="ctr">
+                      <a:noFill/>
+                    </a:lnR>
+                    <a:lnT w="9525" cap="flat" cmpd="sng" algn="ctr">
+                      <a:noFill/>
+                    </a:lnT>
+                    <a:lnB w="9525" cap="flat" cmpd="sng" algn="ctr">
+                      <a:noFill/>
+                    </a:lnB>
+                    <a:solidFill>
+                      <a:srgbClr val="E4EEF2"/>
+                    </a:solidFill>
+                  </a:tcPr>
+                </a:tc>
+                <a:tc>
+                  <a:txBody>
+                    <a:bodyPr wrap="square"/>
+                    <a:lstStyle/>
+                    <a:p>
+                      <a:pPr algn="r"/>
+                      <a:r>
+                        <a:rPr sz="850" b="0" i="0">
+                          <a:solidFill>
+                            <a:srgbClr val="1F1F1F"/>
+                          </a:solidFill>
+                          <a:latin typeface="Arial"/>
+                        </a:rPr>
+                        <a:t>39.4%</a:t>
                       </a:r>
                       <a:endParaRPr sz="850"/>
                     </a:p>
@@ -11921,42 +11957,6 @@
                     </a:solidFill>
                   </a:tcPr>
                 </a:tc>
-                <a:tc>
-                  <a:txBody>
-                    <a:bodyPr wrap="square"/>
-                    <a:lstStyle/>
-                    <a:p>
-                      <a:pPr algn="r"/>
-                      <a:r>
-                        <a:rPr sz="850" b="0" i="0">
-                          <a:solidFill>
-                            <a:srgbClr val="1F1F1F"/>
-                          </a:solidFill>
-                          <a:latin typeface="Arial"/>
-                        </a:rPr>
-                        <a:t>40.1%</a:t>
-                      </a:r>
-                      <a:endParaRPr sz="850"/>
-                    </a:p>
-                  </a:txBody>
-                  <a:tcPr marL="36576" marR="36576" marT="0" marB="0" anchor="ctr">
-                    <a:lnL w="9525" cap="flat" cmpd="sng" algn="ctr">
-                      <a:noFill/>
-                    </a:lnL>
-                    <a:lnR w="9525" cap="flat" cmpd="sng" algn="ctr">
-                      <a:noFill/>
-                    </a:lnR>
-                    <a:lnT w="9525" cap="flat" cmpd="sng" algn="ctr">
-                      <a:noFill/>
-                    </a:lnT>
-                    <a:lnB w="9525" cap="flat" cmpd="sng" algn="ctr">
-                      <a:noFill/>
-                    </a:lnB>
-                    <a:solidFill>
-                      <a:srgbClr val="E4EEF2"/>
-                    </a:solidFill>
-                  </a:tcPr>
-                </a:tc>
               </a:tr>
               <a:tr h="192024">
                 <a:tc>
@@ -12108,7 +12108,7 @@
                           </a:solidFill>
                           <a:latin typeface="Arial"/>
                         </a:rPr>
-                        <a:t>13.2%</a:t>
+                        <a:t>12.7%</a:t>
                       </a:r>
                       <a:endParaRPr sz="850"/>
                     </a:p>
@@ -12144,7 +12144,7 @@
                           </a:solidFill>
                           <a:latin typeface="Arial"/>
                         </a:rPr>
-                        <a:t>13.8%</a:t>
+                        <a:t>13.4%</a:t>
                       </a:r>
                       <a:endParaRPr sz="850"/>
                     </a:p>
@@ -12180,7 +12180,7 @@
                           </a:solidFill>
                           <a:latin typeface="Arial"/>
                         </a:rPr>
-                        <a:t>14.2%</a:t>
+                        <a:t>13.7%</a:t>
                       </a:r>
                       <a:endParaRPr sz="850"/>
                     </a:p>
@@ -12540,7 +12540,7 @@
                           </a:solidFill>
                           <a:latin typeface="Arial"/>
                         </a:rPr>
-                        <a:t>21.8%</a:t>
+                        <a:t>20.7%</a:t>
                       </a:r>
                       <a:endParaRPr sz="850"/>
                     </a:p>
@@ -12576,7 +12576,7 @@
                           </a:solidFill>
                           <a:latin typeface="Arial"/>
                         </a:rPr>
-                        <a:t>23.5%</a:t>
+                        <a:t>22.4%</a:t>
                       </a:r>
                       <a:endParaRPr sz="850"/>
                     </a:p>
@@ -12612,7 +12612,7 @@
                           </a:solidFill>
                           <a:latin typeface="Arial"/>
                         </a:rPr>
-                        <a:t>24.9%</a:t>
+                        <a:t>23.6%</a:t>
                       </a:r>
                       <a:endParaRPr sz="850"/>
                     </a:p>
@@ -12684,7 +12684,7 @@
                           </a:solidFill>
                           <a:latin typeface="Arial"/>
                         </a:rPr>
-                        <a:t>9.0%</a:t>
+                        <a:t>9.1%</a:t>
                       </a:r>
                       <a:endParaRPr sz="850"/>
                     </a:p>
@@ -12718,7 +12718,7 @@
                           </a:solidFill>
                           <a:latin typeface="Arial"/>
                         </a:rPr>
-                        <a:t>9.0%</a:t>
+                        <a:t>9.1%</a:t>
                       </a:r>
                       <a:endParaRPr sz="850"/>
                     </a:p>
@@ -12752,7 +12752,7 @@
                           </a:solidFill>
                           <a:latin typeface="Arial"/>
                         </a:rPr>
-                        <a:t>9.0%</a:t>
+                        <a:t>9.1%</a:t>
                       </a:r>
                       <a:endParaRPr sz="850"/>
                     </a:p>
@@ -12786,7 +12786,7 @@
                           </a:solidFill>
                           <a:latin typeface="Arial"/>
                         </a:rPr>
-                        <a:t>9.0%</a:t>
+                        <a:t>9.1%</a:t>
                       </a:r>
                       <a:endParaRPr sz="850"/>
                     </a:p>
@@ -12820,7 +12820,7 @@
                           </a:solidFill>
                           <a:latin typeface="Arial"/>
                         </a:rPr>
-                        <a:t>9.0%</a:t>
+                        <a:t>9.1%</a:t>
                       </a:r>
                       <a:endParaRPr sz="850"/>
                     </a:p>
@@ -12854,7 +12854,7 @@
                           </a:solidFill>
                           <a:latin typeface="Arial"/>
                         </a:rPr>
-                        <a:t>9.0%</a:t>
+                        <a:t>9.1%</a:t>
                       </a:r>
                       <a:endParaRPr sz="850"/>
                     </a:p>
@@ -12924,7 +12924,7 @@
                           </a:solidFill>
                           <a:latin typeface="Arial"/>
                         </a:rPr>
-                        <a:t>3.7%</a:t>
+                        <a:t>4.0%</a:t>
                       </a:r>
                       <a:endParaRPr sz="850"/>
                     </a:p>
@@ -12958,7 +12958,7 @@
                           </a:solidFill>
                           <a:latin typeface="Arial"/>
                         </a:rPr>
-                        <a:t>4.9%</a:t>
+                        <a:t>5.2%</a:t>
                       </a:r>
                       <a:endParaRPr sz="850"/>
                     </a:p>
@@ -12992,7 +12992,7 @@
                           </a:solidFill>
                           <a:latin typeface="Arial"/>
                         </a:rPr>
-                        <a:t>6.1%</a:t>
+                        <a:t>6.6%</a:t>
                       </a:r>
                       <a:endParaRPr sz="850"/>
                     </a:p>
@@ -13026,7 +13026,7 @@
                           </a:solidFill>
                           <a:latin typeface="Arial"/>
                         </a:rPr>
-                        <a:t>6.0%</a:t>
+                        <a:t>6.2%</a:t>
                       </a:r>
                       <a:endParaRPr sz="850"/>
                     </a:p>
@@ -13062,7 +13062,7 @@
                           </a:solidFill>
                           <a:latin typeface="Arial"/>
                         </a:rPr>
-                        <a:t>6.4%</a:t>
+                        <a:t>6.6%</a:t>
                       </a:r>
                       <a:endParaRPr sz="850"/>
                     </a:p>
@@ -13204,7 +13204,7 @@
                           </a:solidFill>
                           <a:latin typeface="Arial"/>
                         </a:rPr>
-                        <a:t>1.5%</a:t>
+                        <a:t>0.0%</a:t>
                       </a:r>
                       <a:endParaRPr sz="850"/>
                     </a:p>
@@ -13238,7 +13238,7 @@
                           </a:solidFill>
                           <a:latin typeface="Arial"/>
                         </a:rPr>
-                        <a:t>1.6%</a:t>
+                        <a:t>3.3%</a:t>
                       </a:r>
                       <a:endParaRPr sz="850"/>
                     </a:p>
@@ -13272,7 +13272,7 @@
                           </a:solidFill>
                           <a:latin typeface="Arial"/>
                         </a:rPr>
-                        <a:t>3.5%</a:t>
+                        <a:t>3.6%</a:t>
                       </a:r>
                       <a:endParaRPr sz="850"/>
                     </a:p>
@@ -13308,7 +13308,7 @@
                           </a:solidFill>
                           <a:latin typeface="Arial"/>
                         </a:rPr>
-                        <a:t>4.1%</a:t>
+                        <a:t>4.2%</a:t>
                       </a:r>
                       <a:endParaRPr sz="850"/>
                     </a:p>
@@ -13344,7 +13344,7 @@
                           </a:solidFill>
                           <a:latin typeface="Arial"/>
                         </a:rPr>
-                        <a:t>5.1%</a:t>
+                        <a:t>5.2%</a:t>
                       </a:r>
                       <a:endParaRPr sz="850"/>
                     </a:p>
@@ -13633,7 +13633,7 @@
                 </a:solidFill>
                 <a:latin typeface="Arial"/>
               </a:rPr>
-              <a:t>Sources: SATS ASA interim reports (clubs, members, revenue per member, market positions, signed locations); Nordic fitness members (5.2m, 2025): EuropeActive/Deloitte European Health &amp; Fitness Market Report 2025, as quoted in the 2026 Pareto case workbook.</a:t>
+              <a:t>Sources: SATS ASA interim reports and the Q2 2026 presentation (clubs, members, revenue per member, market positions, committed pipeline); Nordic fitness members (5.2m, 2025): EuropeActive/Deloitte European Health &amp; Fitness Market Report 2025, as quoted in the 2026 Pareto case workbook.</a:t>
             </a:r>
             <a:endParaRPr sz="700"/>
           </a:p>
@@ -14876,7 +14876,7 @@
                 </a:solidFill>
                 <a:latin typeface="Arial"/>
               </a:rPr>
-              <a:t>30</a:t>
+              <a:t>13</a:t>
             </a:r>
             <a:endParaRPr sz="1100"/>
           </a:p>
@@ -14912,7 +14912,7 @@
                 </a:solidFill>
                 <a:latin typeface="Arial"/>
               </a:rPr>
-              <a:t>new club locations signed through 2028, against a target of 8-12 openings a year</a:t>
+              <a:t>club openings committed through 2028; a run-rate of 8-12 a year is targeted from 2027</a:t>
             </a:r>
             <a:endParaRPr sz="950"/>
           </a:p>
@@ -15125,7 +15125,7 @@
                 </a:solidFill>
                 <a:latin typeface="Arial"/>
               </a:rPr>
-              <a:t> 8-12 new clubs a year with a ~3-year payback</a:t>
+              <a:t> 8-12 new clubs a year at NOK 7-8m each with a ~3-year payback</a:t>
             </a:r>
             <a:endParaRPr sz="950"/>
           </a:p>
@@ -15310,6 +15310,38 @@
             </a:r>
             <a:endParaRPr sz="950"/>
           </a:p>
+          <a:p>
+            <a:pPr algn="l" marL="146304" indent="-146304">
+              <a:spcAft>
+                <a:spcPts val="500"/>
+              </a:spcAft>
+              <a:buClr>
+                <a:srgbClr val="003255"/>
+              </a:buClr>
+              <a:buSzPct val="100000"/>
+              <a:buFont typeface="Arial"/>
+              <a:buChar char="▪"/>
+            </a:pPr>
+            <a:r>
+              <a:rPr sz="950" b="1" i="0">
+                <a:solidFill>
+                  <a:srgbClr val="1F1F1F"/>
+                </a:solidFill>
+                <a:latin typeface="Arial"/>
+              </a:rPr>
+              <a:t>GLP-1 weight-loss drugs</a:t>
+            </a:r>
+            <a:r>
+              <a:rPr sz="950" b="0" i="0">
+                <a:solidFill>
+                  <a:srgbClr val="1F1F1F"/>
+                </a:solidFill>
+                <a:latin typeface="Arial"/>
+              </a:rPr>
+              <a:t> – so far neutral to positive: users join to keep muscle mass</a:t>
+            </a:r>
+            <a:endParaRPr sz="950"/>
+          </a:p>
         </p:txBody>
       </p:sp>
       <p:sp>
@@ -15455,7 +15487,7 @@
                 </a:solidFill>
                 <a:latin typeface="Arial"/>
               </a:rPr>
-              <a:t> in the big cities could cap pricing power</a:t>
+              <a:t> in the big cities could cap pricing power – Sweden is the contested market</a:t>
             </a:r>
             <a:endParaRPr sz="950"/>
           </a:p>
@@ -15648,7 +15680,7 @@
                 </a:solidFill>
                 <a:latin typeface="Arial"/>
               </a:rPr>
-              <a:t>New locations, like-for-like and price drive a 5.8% revenue CAGR 2025–30E, with EBIT margins expanding to 15%</a:t>
+              <a:t>New locations, like-for-like and price drive a 5.1% revenue CAGR 2025–30E, with EBIT margins expanding to 14%</a:t>
             </a:r>
             <a:endParaRPr sz="1400"/>
           </a:p>
@@ -15754,7 +15786,7 @@
                 </a:solidFill>
                 <a:latin typeface="Arial"/>
               </a:rPr>
-              <a:t>Sources: Company reports, case team estimates (see Excel model: Model, DCF and Comps sheets). Peer multiples: Yahoo Finance consensus (Sep 2026).</a:t>
+              <a:t>Sources: Company reports, case team estimates (see Excel model: Model, DCF and Comps sheets). Peer multiples: Yahoo Finance consensus (Oct 2026).</a:t>
             </a:r>
             <a:endParaRPr sz="700"/>
           </a:p>
@@ -16480,7 +16512,7 @@
                           </a:solidFill>
                           <a:latin typeface="Arial"/>
                         </a:rPr>
-                        <a:t>5,751</a:t>
+                        <a:t>5,665</a:t>
                       </a:r>
                       <a:endParaRPr sz="850"/>
                     </a:p>
@@ -16519,7 +16551,7 @@
                           </a:solidFill>
                           <a:latin typeface="Arial"/>
                         </a:rPr>
-                        <a:t>6,082</a:t>
+                        <a:t>5,952</a:t>
                       </a:r>
                       <a:endParaRPr sz="850"/>
                     </a:p>
@@ -16558,7 +16590,7 @@
                           </a:solidFill>
                           <a:latin typeface="Arial"/>
                         </a:rPr>
-                        <a:t>6,469</a:t>
+                        <a:t>6,301</a:t>
                       </a:r>
                       <a:endParaRPr sz="850"/>
                     </a:p>
@@ -16597,7 +16629,7 @@
                           </a:solidFill>
                           <a:latin typeface="Arial"/>
                         </a:rPr>
-                        <a:t>6,883</a:t>
+                        <a:t>6,683</a:t>
                       </a:r>
                       <a:endParaRPr sz="850"/>
                     </a:p>
@@ -16636,7 +16668,7 @@
                           </a:solidFill>
                           <a:latin typeface="Arial"/>
                         </a:rPr>
-                        <a:t>7,288</a:t>
+                        <a:t>7,075</a:t>
                       </a:r>
                       <a:endParaRPr sz="850"/>
                     </a:p>
@@ -16813,7 +16845,7 @@
                           </a:solidFill>
                           <a:latin typeface="Arial"/>
                         </a:rPr>
-                        <a:t>4.4%</a:t>
+                        <a:t>2.8%</a:t>
                       </a:r>
                       <a:endParaRPr sz="850"/>
                     </a:p>
@@ -16849,79 +16881,7 @@
                           </a:solidFill>
                           <a:latin typeface="Arial"/>
                         </a:rPr>
-                        <a:t>5.8%</a:t>
-                      </a:r>
-                      <a:endParaRPr sz="850"/>
-                    </a:p>
-                  </a:txBody>
-                  <a:tcPr marL="36576" marR="36576" marT="0" marB="0" anchor="ctr">
-                    <a:lnL w="9525" cap="flat" cmpd="sng" algn="ctr">
-                      <a:noFill/>
-                    </a:lnL>
-                    <a:lnR w="9525" cap="flat" cmpd="sng" algn="ctr">
-                      <a:noFill/>
-                    </a:lnR>
-                    <a:lnT w="9525" cap="flat" cmpd="sng" algn="ctr">
-                      <a:noFill/>
-                    </a:lnT>
-                    <a:lnB w="9525" cap="flat" cmpd="sng" algn="ctr">
-                      <a:noFill/>
-                    </a:lnB>
-                    <a:solidFill>
-                      <a:srgbClr val="EEF4F7"/>
-                    </a:solidFill>
-                  </a:tcPr>
-                </a:tc>
-                <a:tc>
-                  <a:txBody>
-                    <a:bodyPr wrap="square"/>
-                    <a:lstStyle/>
-                    <a:p>
-                      <a:pPr algn="r"/>
-                      <a:r>
-                        <a:rPr sz="850" b="0" i="1">
-                          <a:solidFill>
-                            <a:srgbClr val="6B7480"/>
-                          </a:solidFill>
-                          <a:latin typeface="Arial"/>
-                        </a:rPr>
-                        <a:t>6.4%</a:t>
-                      </a:r>
-                      <a:endParaRPr sz="850"/>
-                    </a:p>
-                  </a:txBody>
-                  <a:tcPr marL="36576" marR="36576" marT="0" marB="0" anchor="ctr">
-                    <a:lnL w="9525" cap="flat" cmpd="sng" algn="ctr">
-                      <a:noFill/>
-                    </a:lnL>
-                    <a:lnR w="9525" cap="flat" cmpd="sng" algn="ctr">
-                      <a:noFill/>
-                    </a:lnR>
-                    <a:lnT w="9525" cap="flat" cmpd="sng" algn="ctr">
-                      <a:noFill/>
-                    </a:lnT>
-                    <a:lnB w="9525" cap="flat" cmpd="sng" algn="ctr">
-                      <a:noFill/>
-                    </a:lnB>
-                    <a:solidFill>
-                      <a:srgbClr val="EEF4F7"/>
-                    </a:solidFill>
-                  </a:tcPr>
-                </a:tc>
-                <a:tc>
-                  <a:txBody>
-                    <a:bodyPr wrap="square"/>
-                    <a:lstStyle/>
-                    <a:p>
-                      <a:pPr algn="r"/>
-                      <a:r>
-                        <a:rPr sz="850" b="0" i="1">
-                          <a:solidFill>
-                            <a:srgbClr val="6B7480"/>
-                          </a:solidFill>
-                          <a:latin typeface="Arial"/>
-                        </a:rPr>
-                        <a:t>6.4%</a:t>
+                        <a:t>5.1%</a:t>
                       </a:r>
                       <a:endParaRPr sz="850"/>
                     </a:p>
@@ -16980,6 +16940,78 @@
                     </a:solidFill>
                   </a:tcPr>
                 </a:tc>
+                <a:tc>
+                  <a:txBody>
+                    <a:bodyPr wrap="square"/>
+                    <a:lstStyle/>
+                    <a:p>
+                      <a:pPr algn="r"/>
+                      <a:r>
+                        <a:rPr sz="850" b="0" i="1">
+                          <a:solidFill>
+                            <a:srgbClr val="6B7480"/>
+                          </a:solidFill>
+                          <a:latin typeface="Arial"/>
+                        </a:rPr>
+                        <a:t>6.1%</a:t>
+                      </a:r>
+                      <a:endParaRPr sz="850"/>
+                    </a:p>
+                  </a:txBody>
+                  <a:tcPr marL="36576" marR="36576" marT="0" marB="0" anchor="ctr">
+                    <a:lnL w="9525" cap="flat" cmpd="sng" algn="ctr">
+                      <a:noFill/>
+                    </a:lnL>
+                    <a:lnR w="9525" cap="flat" cmpd="sng" algn="ctr">
+                      <a:noFill/>
+                    </a:lnR>
+                    <a:lnT w="9525" cap="flat" cmpd="sng" algn="ctr">
+                      <a:noFill/>
+                    </a:lnT>
+                    <a:lnB w="9525" cap="flat" cmpd="sng" algn="ctr">
+                      <a:noFill/>
+                    </a:lnB>
+                    <a:solidFill>
+                      <a:srgbClr val="EEF4F7"/>
+                    </a:solidFill>
+                  </a:tcPr>
+                </a:tc>
+                <a:tc>
+                  <a:txBody>
+                    <a:bodyPr wrap="square"/>
+                    <a:lstStyle/>
+                    <a:p>
+                      <a:pPr algn="r"/>
+                      <a:r>
+                        <a:rPr sz="850" b="0" i="1">
+                          <a:solidFill>
+                            <a:srgbClr val="6B7480"/>
+                          </a:solidFill>
+                          <a:latin typeface="Arial"/>
+                        </a:rPr>
+                        <a:t>5.9%</a:t>
+                      </a:r>
+                      <a:endParaRPr sz="850"/>
+                    </a:p>
+                  </a:txBody>
+                  <a:tcPr marL="36576" marR="36576" marT="0" marB="0" anchor="ctr">
+                    <a:lnL w="9525" cap="flat" cmpd="sng" algn="ctr">
+                      <a:noFill/>
+                    </a:lnL>
+                    <a:lnR w="9525" cap="flat" cmpd="sng" algn="ctr">
+                      <a:noFill/>
+                    </a:lnR>
+                    <a:lnT w="9525" cap="flat" cmpd="sng" algn="ctr">
+                      <a:noFill/>
+                    </a:lnT>
+                    <a:lnB w="9525" cap="flat" cmpd="sng" algn="ctr">
+                      <a:noFill/>
+                    </a:lnB>
+                    <a:solidFill>
+                      <a:srgbClr val="EEF4F7"/>
+                    </a:solidFill>
+                  </a:tcPr>
+                </a:tc>
               </a:tr>
               <a:tr h="187452">
                 <a:tc>
@@ -17143,7 +17175,7 @@
                           </a:solidFill>
                           <a:latin typeface="Arial"/>
                         </a:rPr>
-                        <a:t>2,255</a:t>
+                        <a:t>2,203</a:t>
                       </a:r>
                       <a:endParaRPr sz="850"/>
                     </a:p>
@@ -17182,7 +17214,7 @@
                           </a:solidFill>
                           <a:latin typeface="Arial"/>
                         </a:rPr>
-                        <a:t>2,414</a:t>
+                        <a:t>2,342</a:t>
                       </a:r>
                       <a:endParaRPr sz="850"/>
                     </a:p>
@@ -17221,7 +17253,7 @@
                           </a:solidFill>
                           <a:latin typeface="Arial"/>
                         </a:rPr>
-                        <a:t>2,592</a:t>
+                        <a:t>2,500</a:t>
                       </a:r>
                       <a:endParaRPr sz="850"/>
                     </a:p>
@@ -17260,7 +17292,7 @@
                           </a:solidFill>
                           <a:latin typeface="Arial"/>
                         </a:rPr>
-                        <a:t>2,788</a:t>
+                        <a:t>2,675</a:t>
                       </a:r>
                       <a:endParaRPr sz="850"/>
                     </a:p>
@@ -17299,7 +17331,7 @@
                           </a:solidFill>
                           <a:latin typeface="Arial"/>
                         </a:rPr>
-                        <a:t>2,976</a:t>
+                        <a:t>2,854</a:t>
                       </a:r>
                       <a:endParaRPr sz="850"/>
                     </a:p>
@@ -17476,7 +17508,43 @@
                           </a:solidFill>
                           <a:latin typeface="Arial"/>
                         </a:rPr>
-                        <a:t>39.2%</a:t>
+                        <a:t>38.9%</a:t>
+                      </a:r>
+                      <a:endParaRPr sz="850"/>
+                    </a:p>
+                  </a:txBody>
+                  <a:tcPr marL="36576" marR="36576" marT="0" marB="0" anchor="ctr">
+                    <a:lnL w="9525" cap="flat" cmpd="sng" algn="ctr">
+                      <a:noFill/>
+                    </a:lnL>
+                    <a:lnR w="9525" cap="flat" cmpd="sng" algn="ctr">
+                      <a:noFill/>
+                    </a:lnR>
+                    <a:lnT w="9525" cap="flat" cmpd="sng" algn="ctr">
+                      <a:noFill/>
+                    </a:lnT>
+                    <a:lnB w="9525" cap="flat" cmpd="sng" algn="ctr">
+                      <a:noFill/>
+                    </a:lnB>
+                    <a:solidFill>
+                      <a:srgbClr val="EEF4F7"/>
+                    </a:solidFill>
+                  </a:tcPr>
+                </a:tc>
+                <a:tc>
+                  <a:txBody>
+                    <a:bodyPr wrap="square"/>
+                    <a:lstStyle/>
+                    <a:p>
+                      <a:pPr algn="r"/>
+                      <a:r>
+                        <a:rPr sz="850" b="0" i="1">
+                          <a:solidFill>
+                            <a:srgbClr val="6B7480"/>
+                          </a:solidFill>
+                          <a:latin typeface="Arial"/>
+                        </a:rPr>
+                        <a:t>39.4%</a:t>
                       </a:r>
                       <a:endParaRPr sz="850"/>
                     </a:p>
@@ -17548,7 +17616,7 @@
                           </a:solidFill>
                           <a:latin typeface="Arial"/>
                         </a:rPr>
-                        <a:t>40.1%</a:t>
+                        <a:t>40.0%</a:t>
                       </a:r>
                       <a:endParaRPr sz="850"/>
                     </a:p>
@@ -17584,43 +17652,7 @@
                           </a:solidFill>
                           <a:latin typeface="Arial"/>
                         </a:rPr>
-                        <a:t>40.5%</a:t>
-                      </a:r>
-                      <a:endParaRPr sz="850"/>
-                    </a:p>
-                  </a:txBody>
-                  <a:tcPr marL="36576" marR="36576" marT="0" marB="0" anchor="ctr">
-                    <a:lnL w="9525" cap="flat" cmpd="sng" algn="ctr">
-                      <a:noFill/>
-                    </a:lnL>
-                    <a:lnR w="9525" cap="flat" cmpd="sng" algn="ctr">
-                      <a:noFill/>
-                    </a:lnR>
-                    <a:lnT w="9525" cap="flat" cmpd="sng" algn="ctr">
-                      <a:noFill/>
-                    </a:lnT>
-                    <a:lnB w="9525" cap="flat" cmpd="sng" algn="ctr">
-                      <a:noFill/>
-                    </a:lnB>
-                    <a:solidFill>
-                      <a:srgbClr val="EEF4F7"/>
-                    </a:solidFill>
-                  </a:tcPr>
-                </a:tc>
-                <a:tc>
-                  <a:txBody>
-                    <a:bodyPr wrap="square"/>
-                    <a:lstStyle/>
-                    <a:p>
-                      <a:pPr algn="r"/>
-                      <a:r>
-                        <a:rPr sz="850" b="0" i="1">
-                          <a:solidFill>
-                            <a:srgbClr val="6B7480"/>
-                          </a:solidFill>
-                          <a:latin typeface="Arial"/>
-                        </a:rPr>
-                        <a:t>40.8%</a:t>
+                        <a:t>40.3%</a:t>
                       </a:r>
                       <a:endParaRPr sz="850"/>
                     </a:p>
@@ -17806,7 +17838,7 @@
                           </a:solidFill>
                           <a:latin typeface="Arial"/>
                         </a:rPr>
-                        <a:t>756</a:t>
+                        <a:t>719</a:t>
                       </a:r>
                       <a:endParaRPr sz="850"/>
                     </a:p>
@@ -17845,7 +17877,7 @@
                           </a:solidFill>
                           <a:latin typeface="Arial"/>
                         </a:rPr>
-                        <a:t>838</a:t>
+                        <a:t>797</a:t>
                       </a:r>
                       <a:endParaRPr sz="850"/>
                     </a:p>
@@ -17884,7 +17916,7 @@
                           </a:solidFill>
                           <a:latin typeface="Arial"/>
                         </a:rPr>
-                        <a:t>916</a:t>
+                        <a:t>864</a:t>
                       </a:r>
                       <a:endParaRPr sz="850"/>
                     </a:p>
@@ -17923,7 +17955,7 @@
                           </a:solidFill>
                           <a:latin typeface="Arial"/>
                         </a:rPr>
-                        <a:t>1,010</a:t>
+                        <a:t>942</a:t>
                       </a:r>
                       <a:endParaRPr sz="850"/>
                     </a:p>
@@ -17962,7 +17994,7 @@
                           </a:solidFill>
                           <a:latin typeface="Arial"/>
                         </a:rPr>
-                        <a:t>1,095</a:t>
+                        <a:t>1,020</a:t>
                       </a:r>
                       <a:endParaRPr sz="850"/>
                     </a:p>
@@ -18139,7 +18171,7 @@
                           </a:solidFill>
                           <a:latin typeface="Arial"/>
                         </a:rPr>
-                        <a:t>13.2%</a:t>
+                        <a:t>12.7%</a:t>
                       </a:r>
                       <a:endParaRPr sz="850"/>
                     </a:p>
@@ -18175,7 +18207,7 @@
                           </a:solidFill>
                           <a:latin typeface="Arial"/>
                         </a:rPr>
-                        <a:t>13.8%</a:t>
+                        <a:t>13.4%</a:t>
                       </a:r>
                       <a:endParaRPr sz="850"/>
                     </a:p>
@@ -18211,7 +18243,7 @@
                           </a:solidFill>
                           <a:latin typeface="Arial"/>
                         </a:rPr>
-                        <a:t>14.2%</a:t>
+                        <a:t>13.7%</a:t>
                       </a:r>
                       <a:endParaRPr sz="850"/>
                     </a:p>
@@ -18247,7 +18279,7 @@
                           </a:solidFill>
                           <a:latin typeface="Arial"/>
                         </a:rPr>
-                        <a:t>14.7%</a:t>
+                        <a:t>14.1%</a:t>
                       </a:r>
                       <a:endParaRPr sz="850"/>
                     </a:p>
@@ -18283,7 +18315,7 @@
                           </a:solidFill>
                           <a:latin typeface="Arial"/>
                         </a:rPr>
-                        <a:t>15.0%</a:t>
+                        <a:t>14.4%</a:t>
                       </a:r>
                       <a:endParaRPr sz="850"/>
                     </a:p>
@@ -18457,7 +18489,7 @@
                           </a:solidFill>
                           <a:latin typeface="Arial"/>
                         </a:rPr>
-                        <a:t>548</a:t>
+                        <a:t>523</a:t>
                       </a:r>
                       <a:endParaRPr sz="850"/>
                     </a:p>
@@ -18493,7 +18525,7 @@
                           </a:solidFill>
                           <a:latin typeface="Arial"/>
                         </a:rPr>
-                        <a:t>614</a:t>
+                        <a:t>577</a:t>
                       </a:r>
                       <a:endParaRPr sz="850"/>
                     </a:p>
@@ -18529,7 +18561,43 @@
                           </a:solidFill>
                           <a:latin typeface="Arial"/>
                         </a:rPr>
-                        <a:t>672</a:t>
+                        <a:t>629</a:t>
+                      </a:r>
+                      <a:endParaRPr sz="850"/>
+                    </a:p>
+                  </a:txBody>
+                  <a:tcPr marL="36576" marR="36576" marT="0" marB="0" anchor="ctr">
+                    <a:lnL w="9525" cap="flat" cmpd="sng" algn="ctr">
+                      <a:noFill/>
+                    </a:lnL>
+                    <a:lnR w="9525" cap="flat" cmpd="sng" algn="ctr">
+                      <a:noFill/>
+                    </a:lnR>
+                    <a:lnT w="9525" cap="flat" cmpd="sng" algn="ctr">
+                      <a:noFill/>
+                    </a:lnT>
+                    <a:lnB w="9525" cap="flat" cmpd="sng" algn="ctr">
+                      <a:noFill/>
+                    </a:lnB>
+                    <a:solidFill>
+                      <a:srgbClr val="EEF4F7"/>
+                    </a:solidFill>
+                  </a:tcPr>
+                </a:tc>
+                <a:tc>
+                  <a:txBody>
+                    <a:bodyPr wrap="square"/>
+                    <a:lstStyle/>
+                    <a:p>
+                      <a:pPr algn="r"/>
+                      <a:r>
+                        <a:rPr sz="850" b="0" i="0">
+                          <a:solidFill>
+                            <a:srgbClr val="1F1F1F"/>
+                          </a:solidFill>
+                          <a:latin typeface="Arial"/>
+                        </a:rPr>
+                        <a:t>686</a:t>
                       </a:r>
                       <a:endParaRPr sz="850"/>
                     </a:p>
@@ -18588,42 +18656,6 @@
                     </a:solidFill>
                   </a:tcPr>
                 </a:tc>
-                <a:tc>
-                  <a:txBody>
-                    <a:bodyPr wrap="square"/>
-                    <a:lstStyle/>
-                    <a:p>
-                      <a:pPr algn="r"/>
-                      <a:r>
-                        <a:rPr sz="850" b="0" i="0">
-                          <a:solidFill>
-                            <a:srgbClr val="1F1F1F"/>
-                          </a:solidFill>
-                          <a:latin typeface="Arial"/>
-                        </a:rPr>
-                        <a:t>804</a:t>
-                      </a:r>
-                      <a:endParaRPr sz="850"/>
-                    </a:p>
-                  </a:txBody>
-                  <a:tcPr marL="36576" marR="36576" marT="0" marB="0" anchor="ctr">
-                    <a:lnL w="9525" cap="flat" cmpd="sng" algn="ctr">
-                      <a:noFill/>
-                    </a:lnL>
-                    <a:lnR w="9525" cap="flat" cmpd="sng" algn="ctr">
-                      <a:noFill/>
-                    </a:lnR>
-                    <a:lnT w="9525" cap="flat" cmpd="sng" algn="ctr">
-                      <a:noFill/>
-                    </a:lnT>
-                    <a:lnB w="9525" cap="flat" cmpd="sng" algn="ctr">
-                      <a:noFill/>
-                    </a:lnB>
-                    <a:solidFill>
-                      <a:srgbClr val="EEF4F7"/>
-                    </a:solidFill>
-                  </a:tcPr>
-                </a:tc>
               </a:tr>
               <a:tr h="187452">
                 <a:tc>
@@ -18775,7 +18807,7 @@
                           </a:solidFill>
                           <a:latin typeface="Arial"/>
                         </a:rPr>
-                        <a:t>2.95</a:t>
+                        <a:t>2.87</a:t>
                       </a:r>
                       <a:endParaRPr sz="850"/>
                     </a:p>
@@ -18811,7 +18843,7 @@
                           </a:solidFill>
                           <a:latin typeface="Arial"/>
                         </a:rPr>
-                        <a:t>3.44</a:t>
+                        <a:t>3.31</a:t>
                       </a:r>
                       <a:endParaRPr sz="850"/>
                     </a:p>
@@ -18847,7 +18879,7 @@
                           </a:solidFill>
                           <a:latin typeface="Arial"/>
                         </a:rPr>
-                        <a:t>3.93</a:t>
+                        <a:t>3.77</a:t>
                       </a:r>
                       <a:endParaRPr sz="850"/>
                     </a:p>
@@ -18883,7 +18915,7 @@
                           </a:solidFill>
                           <a:latin typeface="Arial"/>
                         </a:rPr>
-                        <a:t>4.54</a:t>
+                        <a:t>4.30</a:t>
                       </a:r>
                       <a:endParaRPr sz="850"/>
                     </a:p>
@@ -18919,7 +18951,7 @@
                           </a:solidFill>
                           <a:latin typeface="Arial"/>
                         </a:rPr>
-                        <a:t>5.14</a:t>
+                        <a:t>4.88</a:t>
                       </a:r>
                       <a:endParaRPr sz="850"/>
                     </a:p>
@@ -19025,7 +19057,7 @@
                           </a:solidFill>
                           <a:latin typeface="Arial"/>
                         </a:rPr>
-                        <a:t>0.63</a:t>
+                        <a:t>0.00</a:t>
                       </a:r>
                       <a:endParaRPr sz="850"/>
                     </a:p>
@@ -19059,7 +19091,7 @@
                           </a:solidFill>
                           <a:latin typeface="Arial"/>
                         </a:rPr>
-                        <a:t>0.67</a:t>
+                        <a:t>1.30</a:t>
                       </a:r>
                       <a:endParaRPr sz="850"/>
                     </a:p>
@@ -19093,7 +19125,7 @@
                           </a:solidFill>
                           <a:latin typeface="Arial"/>
                         </a:rPr>
-                        <a:t>1.48</a:t>
+                        <a:t>1.43</a:t>
                       </a:r>
                       <a:endParaRPr sz="850"/>
                     </a:p>
@@ -19129,7 +19161,7 @@
                           </a:solidFill>
                           <a:latin typeface="Arial"/>
                         </a:rPr>
-                        <a:t>1.72</a:t>
+                        <a:t>1.65</a:t>
                       </a:r>
                       <a:endParaRPr sz="850"/>
                     </a:p>
@@ -19165,7 +19197,7 @@
                           </a:solidFill>
                           <a:latin typeface="Arial"/>
                         </a:rPr>
-                        <a:t>2.16</a:t>
+                        <a:t>2.07</a:t>
                       </a:r>
                       <a:endParaRPr sz="850"/>
                     </a:p>
@@ -19201,7 +19233,7 @@
                           </a:solidFill>
                           <a:latin typeface="Arial"/>
                         </a:rPr>
-                        <a:t>2.49</a:t>
+                        <a:t>2.37</a:t>
                       </a:r>
                       <a:endParaRPr sz="850"/>
                     </a:p>
@@ -19237,7 +19269,7 @@
                           </a:solidFill>
                           <a:latin typeface="Arial"/>
                         </a:rPr>
-                        <a:t>3.09</a:t>
+                        <a:t>2.93</a:t>
                       </a:r>
                       <a:endParaRPr sz="850"/>
                     </a:p>
@@ -19423,7 +19455,7 @@
                           </a:solidFill>
                           <a:latin typeface="Arial"/>
                         </a:rPr>
-                        <a:t>532</a:t>
+                        <a:t>508</a:t>
                       </a:r>
                       <a:endParaRPr sz="850"/>
                     </a:p>
@@ -19462,7 +19494,7 @@
                           </a:solidFill>
                           <a:latin typeface="Arial"/>
                         </a:rPr>
-                        <a:t>562</a:t>
+                        <a:t>543</a:t>
                       </a:r>
                       <a:endParaRPr sz="850"/>
                     </a:p>
@@ -19501,7 +19533,46 @@
                           </a:solidFill>
                           <a:latin typeface="Arial"/>
                         </a:rPr>
-                        <a:t>625</a:t>
+                        <a:t>590</a:t>
+                      </a:r>
+                      <a:endParaRPr sz="850"/>
+                    </a:p>
+                  </a:txBody>
+                  <a:tcPr marL="36576" marR="36576" marT="0" marB="0" anchor="ctr">
+                    <a:lnL w="9525" cap="flat" cmpd="sng" algn="ctr">
+                      <a:noFill/>
+                    </a:lnL>
+                    <a:lnR w="9525" cap="flat" cmpd="sng" algn="ctr">
+                      <a:noFill/>
+                    </a:lnR>
+                    <a:lnT w="9525" cap="flat" cmpd="sng" algn="ctr">
+                      <a:solidFill>
+                        <a:srgbClr val="BFC5CC"/>
+                      </a:solidFill>
+                      <a:prstDash val="solid"/>
+                    </a:lnT>
+                    <a:lnB w="9525" cap="flat" cmpd="sng" algn="ctr">
+                      <a:noFill/>
+                    </a:lnB>
+                    <a:solidFill>
+                      <a:srgbClr val="EEF4F7"/>
+                    </a:solidFill>
+                  </a:tcPr>
+                </a:tc>
+                <a:tc>
+                  <a:txBody>
+                    <a:bodyPr wrap="square"/>
+                    <a:lstStyle/>
+                    <a:p>
+                      <a:pPr algn="r"/>
+                      <a:r>
+                        <a:rPr sz="850" b="1" i="0">
+                          <a:solidFill>
+                            <a:srgbClr val="1F1F1F"/>
+                          </a:solidFill>
+                          <a:latin typeface="Arial"/>
+                        </a:rPr>
+                        <a:t>651</a:t>
                       </a:r>
                       <a:endParaRPr sz="850"/>
                     </a:p>
@@ -19566,45 +19637,6 @@
                     </a:solidFill>
                   </a:tcPr>
                 </a:tc>
-                <a:tc>
-                  <a:txBody>
-                    <a:bodyPr wrap="square"/>
-                    <a:lstStyle/>
-                    <a:p>
-                      <a:pPr algn="r"/>
-                      <a:r>
-                        <a:rPr sz="850" b="1" i="0">
-                          <a:solidFill>
-                            <a:srgbClr val="1F1F1F"/>
-                          </a:solidFill>
-                          <a:latin typeface="Arial"/>
-                        </a:rPr>
-                        <a:t>765</a:t>
-                      </a:r>
-                      <a:endParaRPr sz="850"/>
-                    </a:p>
-                  </a:txBody>
-                  <a:tcPr marL="36576" marR="36576" marT="0" marB="0" anchor="ctr">
-                    <a:lnL w="9525" cap="flat" cmpd="sng" algn="ctr">
-                      <a:noFill/>
-                    </a:lnL>
-                    <a:lnR w="9525" cap="flat" cmpd="sng" algn="ctr">
-                      <a:noFill/>
-                    </a:lnR>
-                    <a:lnT w="9525" cap="flat" cmpd="sng" algn="ctr">
-                      <a:solidFill>
-                        <a:srgbClr val="BFC5CC"/>
-                      </a:solidFill>
-                      <a:prstDash val="solid"/>
-                    </a:lnT>
-                    <a:lnB w="9525" cap="flat" cmpd="sng" algn="ctr">
-                      <a:noFill/>
-                    </a:lnB>
-                    <a:solidFill>
-                      <a:srgbClr val="EEF4F7"/>
-                    </a:solidFill>
-                  </a:tcPr>
-                </a:tc>
               </a:tr>
               <a:tr h="187452">
                 <a:tc>
@@ -19756,7 +19788,7 @@
                           </a:solidFill>
                           <a:latin typeface="Arial"/>
                         </a:rPr>
-                        <a:t>21.8%</a:t>
+                        <a:t>20.7%</a:t>
                       </a:r>
                       <a:endParaRPr sz="850"/>
                     </a:p>
@@ -19792,7 +19824,7 @@
                           </a:solidFill>
                           <a:latin typeface="Arial"/>
                         </a:rPr>
-                        <a:t>23.5%</a:t>
+                        <a:t>22.4%</a:t>
                       </a:r>
                       <a:endParaRPr sz="850"/>
                     </a:p>
@@ -19828,7 +19860,7 @@
                           </a:solidFill>
                           <a:latin typeface="Arial"/>
                         </a:rPr>
-                        <a:t>24.9%</a:t>
+                        <a:t>23.6%</a:t>
                       </a:r>
                       <a:endParaRPr sz="850"/>
                     </a:p>
@@ -19864,7 +19896,7 @@
                           </a:solidFill>
                           <a:latin typeface="Arial"/>
                         </a:rPr>
-                        <a:t>26.6%</a:t>
+                        <a:t>25.0%</a:t>
                       </a:r>
                       <a:endParaRPr sz="850"/>
                     </a:p>
@@ -19900,7 +19932,7 @@
                           </a:solidFill>
                           <a:latin typeface="Arial"/>
                         </a:rPr>
-                        <a:t>28.1%</a:t>
+                        <a:t>26.3%</a:t>
                       </a:r>
                       <a:endParaRPr sz="850"/>
                     </a:p>
@@ -20074,7 +20106,7 @@
                           </a:solidFill>
                           <a:latin typeface="Arial"/>
                         </a:rPr>
-                        <a:t>1.0x</a:t>
+                        <a:t>1.2x</a:t>
                       </a:r>
                       <a:endParaRPr sz="850"/>
                     </a:p>
@@ -20110,7 +20142,7 @@
                           </a:solidFill>
                           <a:latin typeface="Arial"/>
                         </a:rPr>
-                        <a:t>1.0x</a:t>
+                        <a:t>1.2x</a:t>
                       </a:r>
                       <a:endParaRPr sz="850"/>
                     </a:p>
@@ -20146,7 +20178,7 @@
                           </a:solidFill>
                           <a:latin typeface="Arial"/>
                         </a:rPr>
-                        <a:t>1.0x</a:t>
+                        <a:t>1.2x</a:t>
                       </a:r>
                       <a:endParaRPr sz="850"/>
                     </a:p>
@@ -20182,7 +20214,7 @@
                           </a:solidFill>
                           <a:latin typeface="Arial"/>
                         </a:rPr>
-                        <a:t>1.0x</a:t>
+                        <a:t>1.2x</a:t>
                       </a:r>
                       <a:endParaRPr sz="850"/>
                     </a:p>
@@ -20218,7 +20250,7 @@
                           </a:solidFill>
                           <a:latin typeface="Arial"/>
                         </a:rPr>
-                        <a:t>1.0x</a:t>
+                        <a:t>1.2x</a:t>
                       </a:r>
                       <a:endParaRPr sz="850"/>
                     </a:p>
@@ -20845,7 +20877,7 @@
                 </a:solidFill>
                 <a:latin typeface="Arial"/>
               </a:rPr>
-              <a:t>5.8% revenue CAGR</a:t>
+              <a:t>5.1% revenue CAGR</a:t>
             </a:r>
             <a:r>
               <a:rPr sz="900" b="0" i="0">
@@ -20854,7 +20886,7 @@
                 </a:solidFill>
                 <a:latin typeface="Arial"/>
               </a:rPr>
-              <a:t> 2025–30E: new locations add ~2.0pp, like-for-like ~0.8pp and price/mix ~3.0pp p.a.</a:t>
+              <a:t> 2025–30E: new locations add ~1.5pp, like-for-like ~0.8pp and price/mix ~2.9pp p.a.</a:t>
             </a:r>
             <a:endParaRPr sz="900"/>
           </a:p>
@@ -20886,7 +20918,7 @@
                 </a:solidFill>
                 <a:latin typeface="Arial"/>
               </a:rPr>
-              <a:t> lifts EBIT adj. margin from 11.7% to 15.0% as fixed costs and rent grow with inflation and locations, not with sales</a:t>
+              <a:t> lifts EBIT adj. margin from 11.7% to 14.4% as fixed costs and rent grow with inflation and locations, not with sales</a:t>
             </a:r>
             <a:endParaRPr sz="900"/>
           </a:p>
@@ -20918,7 +20950,7 @@
                 </a:solidFill>
                 <a:latin typeface="Arial"/>
               </a:rPr>
-              <a:t> 36 openings at ~NOK 9m each lift capex to 5.3% of sales (5.6% in 2025A)</a:t>
+              <a:t> 31 openings at ~NOK 9m each lift capex to 5.0% of sales (5.6% in 2025A)</a:t>
             </a:r>
             <a:endParaRPr sz="900"/>
           </a:p>
@@ -20950,7 +20982,7 @@
                 </a:solidFill>
                 <a:latin typeface="Arial"/>
               </a:rPr>
-              <a:t> ~54% of EBITDAaL converts to FCFF; negative working capital funds growth</a:t>
+              <a:t> ~53% of EBITDAaL converts to FCFF; negative working capital funds growth</a:t>
             </a:r>
             <a:endParaRPr sz="900"/>
           </a:p>
@@ -20973,7 +21005,7 @@
                 </a:solidFill>
                 <a:latin typeface="Arial"/>
               </a:rPr>
-              <a:t>ROIC of 28% by 2030E</a:t>
+              <a:t>ROIC of 26% by 2030E</a:t>
             </a:r>
             <a:r>
               <a:rPr sz="900" b="0" i="0">
@@ -20982,7 +21014,7 @@
                 </a:solidFill>
                 <a:latin typeface="Arial"/>
               </a:rPr>
-              <a:t> – far above our 9.0% WACC</a:t>
+              <a:t> – far above our 9.1% WACC</a:t>
             </a:r>
             <a:endParaRPr sz="900"/>
           </a:p>
@@ -21014,7 +21046,7 @@
                 </a:solidFill>
                 <a:latin typeface="Arial"/>
               </a:rPr>
-              <a:t> payout from 50% to 60%; cash above 1.00x NIBD/EBITDAaL funds buybacks – NOK 1,889m over 2026–30E</a:t>
+              <a:t> payout from 50% to 60%; cash above 1.25x NIBD/EBITDAaL funds buybacks – NOK 1,888m over 2026–30E</a:t>
             </a:r>
             <a:endParaRPr sz="900"/>
           </a:p>
@@ -21362,11 +21394,11 @@
                       <a:r>
                         <a:rPr sz="850" b="0" i="0">
                           <a:solidFill>
-                            <a:srgbClr val="2E7D32"/>
+                            <a:srgbClr val="C00000"/>
                           </a:solidFill>
                           <a:latin typeface="Arial"/>
                         </a:rPr>
-                        <a:t>+0.5%</a:t>
+                        <a:t>-0.8%</a:t>
                       </a:r>
                       <a:endParaRPr sz="850"/>
                     </a:p>
@@ -21399,11 +21431,11 @@
                       <a:r>
                         <a:rPr sz="850" b="0" i="0">
                           <a:solidFill>
-                            <a:srgbClr val="1F1F1F"/>
+                            <a:srgbClr val="C00000"/>
                           </a:solidFill>
                           <a:latin typeface="Arial"/>
                         </a:rPr>
-                        <a:t>+0.3%</a:t>
+                        <a:t>-1.5%</a:t>
                       </a:r>
                       <a:endParaRPr sz="850"/>
                     </a:p>
@@ -21812,11 +21844,11 @@
                       <a:r>
                         <a:rPr sz="850" b="1" i="0">
                           <a:solidFill>
-                            <a:srgbClr val="1F1F1F"/>
+                            <a:srgbClr val="C00000"/>
                           </a:solidFill>
                           <a:latin typeface="Arial"/>
                         </a:rPr>
-                        <a:t>+0.4%</a:t>
+                        <a:t>-1.1%</a:t>
                       </a:r>
                       <a:endParaRPr sz="850"/>
                     </a:p>
@@ -21853,7 +21885,7 @@
                           </a:solidFill>
                           <a:latin typeface="Arial"/>
                         </a:rPr>
-                        <a:t>-2.6%</a:t>
+                        <a:t>-5.8%</a:t>
                       </a:r>
                       <a:endParaRPr sz="850"/>
                     </a:p>
@@ -21958,7 +21990,7 @@
                 </a:solidFill>
                 <a:latin typeface="Arial"/>
               </a:rPr>
-              <a:t> Consensus: Near-term estimates are close to ours, but the share price implies only ~12.7% in 2033 (11.7% today). We: EBIT adj. margin rises from 11.7% (2025) to 15.6% by 2033 on a largely fixed cost base.</a:t>
+              <a:t> Consensus: Close to us for 2026 and ~6% above us on 2027 EPS; the share price implies only ~12.3% in 2033 (11.7% today). We: EBIT adj. margin rises from 11.7% (2025) to 15.1% by 2033 on a largely fixed cost base.</a:t>
             </a:r>
             <a:endParaRPr sz="750"/>
           </a:p>
@@ -22119,7 +22151,7 @@
                 </a:solidFill>
                 <a:latin typeface="Arial"/>
               </a:rPr>
-              <a:t>We recommend BUY with a target price of NOK 57 – 35% upside and 38% expected total return</a:t>
+              <a:t>We recommend BUY with a target price of NOK 54 – 36% upside and 39% expected total return</a:t>
             </a:r>
             <a:endParaRPr sz="1400"/>
           </a:p>
@@ -22225,7 +22257,7 @@
                 </a:solidFill>
                 <a:latin typeface="Arial"/>
               </a:rPr>
-              <a:t>Sources: Case team DCF and peer analysis; peer multiples from Yahoo Finance consensus (Sep 2026). (1) TP = 70% DCF + 30% peer multiples, rolled forward 12 months at the cost of equity less next year's dividend.</a:t>
+              <a:t>Sources: Case team DCF and peer analysis; peer multiples from Yahoo Finance consensus (Oct 2026). (1) TP = 70% DCF + 30% peer multiples, rolled forward 12 months at the cost of equity less next year's dividend.</a:t>
             </a:r>
             <a:endParaRPr sz="700"/>
           </a:p>
@@ -22366,7 +22398,7 @@
                 </a:solidFill>
                 <a:latin typeface="Arial"/>
               </a:rPr>
-              <a:t>Our take: at NOK 42 the market prices in an EBIT margin of </a:t>
+              <a:t>Our take: at NOK 40 the market prices in an EBIT margin of </a:t>
             </a:r>
             <a:r>
               <a:rPr sz="1050" b="1" i="0">
@@ -22375,7 +22407,7 @@
                 </a:solidFill>
                 <a:latin typeface="Arial"/>
               </a:rPr>
-              <a:t>12.7%</a:t>
+              <a:t>12.3%</a:t>
             </a:r>
             <a:r>
               <a:rPr sz="1050" b="0" i="0">
@@ -22393,7 +22425,7 @@
                 </a:solidFill>
                 <a:latin typeface="Arial"/>
               </a:rPr>
-              <a:t>15.6%</a:t>
+              <a:t>15.1%</a:t>
             </a:r>
             <a:r>
               <a:rPr sz="1050" b="0" i="0">
@@ -22402,7 +22434,7 @@
                 </a:solidFill>
                 <a:latin typeface="Arial"/>
               </a:rPr>
-              <a:t> as fixed costs are spread over more locations. DCF NOK 54 and peers NOK 52 both point higher: </a:t>
+              <a:t> as fixed costs are spread over more locations. DCF NOK 51 and peers NOK 50 both point higher: </a:t>
             </a:r>
             <a:r>
               <a:rPr sz="1050" b="1" i="0">
@@ -22411,7 +22443,7 @@
                 </a:solidFill>
                 <a:latin typeface="Arial"/>
               </a:rPr>
-              <a:t>12-month target price NOK 57</a:t>
+              <a:t>12-month target price NOK 54</a:t>
             </a:r>
             <a:r>
               <a:rPr sz="1050" b="0" i="0">
@@ -22474,7 +22506,7 @@
                 </a:solidFill>
                 <a:latin typeface="Arial"/>
               </a:rPr>
-              <a:t>BUY – TP NOK 57</a:t>
+              <a:t>BUY – TP NOK 54</a:t>
             </a:r>
             <a:endParaRPr sz="1200"/>
           </a:p>
@@ -22604,7 +22636,7 @@
                 </a:solidFill>
                 <a:latin typeface="Arial"/>
               </a:rPr>
-              <a:t> the share price implies a 12.7% EBIT margin in 2033E (11.7% today) – we model 15.6%</a:t>
+              <a:t> the share price implies a 12.3% EBIT margin in 2033E (11.7% today) – we model 15.1%</a:t>
             </a:r>
             <a:endParaRPr sz="950"/>
           </a:p>
@@ -22636,7 +22668,7 @@
                 </a:solidFill>
                 <a:latin typeface="Arial"/>
               </a:rPr>
-              <a:t> revenue per member, members per club and ~9 net openings a year from 30 signed leases</a:t>
+              <a:t> revenue per member, members per club and 7-8 net openings a year (13 committed through 2028, target 8-12)</a:t>
             </a:r>
             <a:endParaRPr sz="950"/>
           </a:p>
@@ -22700,7 +22732,7 @@
                 </a:solidFill>
                 <a:latin typeface="Arial"/>
               </a:rPr>
-              <a:t> bull NOK 92 vs. bear NOK 15 per share (DCF)</a:t>
+              <a:t> bull NOK 74 vs. bear NOK 28 per share (DCF)</a:t>
             </a:r>
             <a:endParaRPr sz="950"/>
           </a:p>
@@ -22835,7 +22867,7 @@
         </p:nvSpPr>
         <p:spPr>
           <a:xfrm>
-            <a:off x="2421236" y="4857140"/>
+            <a:off x="2366455" y="4857140"/>
             <a:ext cx="384048" cy="182880"/>
           </a:xfrm>
           <a:prstGeom prst="rect">
@@ -22871,7 +22903,7 @@
         </p:nvSpPr>
         <p:spPr>
           <a:xfrm>
-            <a:off x="3406861" y="4857140"/>
+            <a:off x="3515753" y="4857140"/>
             <a:ext cx="384048" cy="182880"/>
           </a:xfrm>
           <a:prstGeom prst="rect">
@@ -22907,7 +22939,7 @@
         </p:nvSpPr>
         <p:spPr>
           <a:xfrm>
-            <a:off x="2579090" y="5079949"/>
+            <a:off x="2522554" y="5079949"/>
             <a:ext cx="384048" cy="182880"/>
           </a:xfrm>
           <a:prstGeom prst="rect">
@@ -22929,7 +22961,7 @@
                 </a:solidFill>
                 <a:latin typeface="Arial"/>
               </a:rPr>
-              <a:t>49</a:t>
+              <a:t>46</a:t>
             </a:r>
             <a:endParaRPr sz="800"/>
           </a:p>
@@ -22943,7 +22975,7 @@
         </p:nvSpPr>
         <p:spPr>
           <a:xfrm>
-            <a:off x="3468589" y="5079949"/>
+            <a:off x="3584251" y="5079949"/>
             <a:ext cx="384048" cy="182880"/>
           </a:xfrm>
           <a:prstGeom prst="rect">
@@ -22965,7 +22997,7 @@
                 </a:solidFill>
                 <a:latin typeface="Arial"/>
               </a:rPr>
-              <a:t>60</a:t>
+              <a:t>56</a:t>
             </a:r>
             <a:endParaRPr sz="800"/>
           </a:p>
@@ -22979,7 +23011,7 @@
         </p:nvSpPr>
         <p:spPr>
           <a:xfrm>
-            <a:off x="1934427" y="5302758"/>
+            <a:off x="2104452" y="5302758"/>
             <a:ext cx="384048" cy="182880"/>
           </a:xfrm>
           <a:prstGeom prst="rect">
@@ -23001,7 +23033,7 @@
                 </a:solidFill>
                 <a:latin typeface="Arial"/>
               </a:rPr>
-              <a:t>15</a:t>
+              <a:t>28</a:t>
             </a:r>
             <a:endParaRPr sz="800"/>
           </a:p>
@@ -23037,7 +23069,7 @@
                 </a:solidFill>
                 <a:latin typeface="Arial"/>
               </a:rPr>
-              <a:t>92</a:t>
+              <a:t>74</a:t>
             </a:r>
             <a:endParaRPr sz="800"/>
           </a:p>
@@ -23051,7 +23083,7 @@
         </p:nvSpPr>
         <p:spPr>
           <a:xfrm>
-            <a:off x="2579090" y="5525566"/>
+            <a:off x="2522554" y="5525566"/>
             <a:ext cx="384048" cy="182880"/>
           </a:xfrm>
           <a:prstGeom prst="rect">
@@ -23073,7 +23105,7 @@
                 </a:solidFill>
                 <a:latin typeface="Arial"/>
               </a:rPr>
-              <a:t>44</a:t>
+              <a:t>42</a:t>
             </a:r>
             <a:endParaRPr sz="800"/>
           </a:p>
@@ -23087,7 +23119,7 @@
         </p:nvSpPr>
         <p:spPr>
           <a:xfrm>
-            <a:off x="3383506" y="5525566"/>
+            <a:off x="3517859" y="5525566"/>
             <a:ext cx="384048" cy="182880"/>
           </a:xfrm>
           <a:prstGeom prst="rect">
@@ -23109,7 +23141,7 @@
                 </a:solidFill>
                 <a:latin typeface="Arial"/>
               </a:rPr>
-              <a:t>57</a:t>
+              <a:t>55</a:t>
             </a:r>
             <a:endParaRPr sz="800"/>
           </a:p>
@@ -23123,7 +23155,7 @@
         </p:nvSpPr>
         <p:spPr>
           <a:xfrm>
-            <a:off x="2579090" y="5748375"/>
+            <a:off x="2522554" y="5748375"/>
             <a:ext cx="384048" cy="182880"/>
           </a:xfrm>
           <a:prstGeom prst="rect">
@@ -23145,7 +23177,7 @@
                 </a:solidFill>
                 <a:latin typeface="Arial"/>
               </a:rPr>
-              <a:t>47</a:t>
+              <a:t>45</a:t>
             </a:r>
             <a:endParaRPr sz="800"/>
           </a:p>
@@ -23159,7 +23191,7 @@
         </p:nvSpPr>
         <p:spPr>
           <a:xfrm>
-            <a:off x="3795952" y="5748375"/>
+            <a:off x="4103071" y="5748375"/>
             <a:ext cx="384048" cy="182880"/>
           </a:xfrm>
           <a:prstGeom prst="rect">
@@ -23181,7 +23213,7 @@
                 </a:solidFill>
                 <a:latin typeface="Arial"/>
               </a:rPr>
-              <a:t>74</a:t>
+              <a:t>71</a:t>
             </a:r>
             <a:endParaRPr sz="800"/>
           </a:p>
@@ -23195,7 +23227,7 @@
         </p:nvSpPr>
         <p:spPr>
           <a:xfrm>
-            <a:off x="2579090" y="5971184"/>
+            <a:off x="2522554" y="5971184"/>
             <a:ext cx="384048" cy="182880"/>
           </a:xfrm>
           <a:prstGeom prst="rect">
@@ -23217,7 +23249,7 @@
                 </a:solidFill>
                 <a:latin typeface="Arial"/>
               </a:rPr>
-              <a:t>43</a:t>
+              <a:t>42</a:t>
             </a:r>
             <a:endParaRPr sz="800"/>
           </a:p>
@@ -23231,7 +23263,7 @@
         </p:nvSpPr>
         <p:spPr>
           <a:xfrm>
-            <a:off x="3522441" y="5971184"/>
+            <a:off x="3722331" y="5971184"/>
             <a:ext cx="384048" cy="182880"/>
           </a:xfrm>
           <a:prstGeom prst="rect">
@@ -23253,7 +23285,7 @@
                 </a:solidFill>
                 <a:latin typeface="Arial"/>
               </a:rPr>
-              <a:t>63</a:t>
+              <a:t>60</a:t>
             </a:r>
             <a:endParaRPr sz="800"/>
           </a:p>
@@ -23267,7 +23299,7 @@
         </p:nvCxnSpPr>
         <p:spPr>
           <a:xfrm>
-            <a:off x="3008858" y="4818888"/>
+            <a:off x="2952322" y="4818888"/>
             <a:ext cx="0" cy="1355140"/>
           </a:xfrm>
           <a:prstGeom prst="line">
@@ -23303,7 +23335,7 @@
         </p:nvCxnSpPr>
         <p:spPr>
           <a:xfrm>
-            <a:off x="3279528" y="4818888"/>
+            <a:off x="3341286" y="4818888"/>
             <a:ext cx="0" cy="1355140"/>
           </a:xfrm>
           <a:prstGeom prst="line">
@@ -23338,7 +23370,7 @@
         </p:nvCxnSpPr>
         <p:spPr>
           <a:xfrm>
-            <a:off x="3361141" y="4818888"/>
+            <a:off x="3470033" y="4818888"/>
             <a:ext cx="0" cy="1355140"/>
           </a:xfrm>
           <a:prstGeom prst="line">
@@ -23374,7 +23406,7 @@
         </p:nvSpPr>
         <p:spPr>
           <a:xfrm>
-            <a:off x="2487650" y="4599432"/>
+            <a:off x="2431114" y="4599432"/>
             <a:ext cx="502920" cy="182880"/>
           </a:xfrm>
           <a:prstGeom prst="rect">
@@ -23396,7 +23428,7 @@
                 </a:solidFill>
                 <a:latin typeface="Arial"/>
               </a:rPr>
-              <a:t>42</a:t>
+              <a:t>40</a:t>
             </a:r>
             <a:endParaRPr sz="800"/>
           </a:p>
@@ -23410,7 +23442,7 @@
         </p:nvSpPr>
         <p:spPr>
           <a:xfrm>
-            <a:off x="2758320" y="4599432"/>
+            <a:off x="2820078" y="4599432"/>
             <a:ext cx="502920" cy="182880"/>
           </a:xfrm>
           <a:prstGeom prst="rect">
@@ -23432,7 +23464,7 @@
                 </a:solidFill>
                 <a:latin typeface="Arial"/>
               </a:rPr>
-              <a:t>54</a:t>
+              <a:t>50</a:t>
             </a:r>
             <a:endParaRPr sz="800"/>
           </a:p>
@@ -23446,7 +23478,7 @@
         </p:nvSpPr>
         <p:spPr>
           <a:xfrm>
-            <a:off x="3379429" y="4599432"/>
+            <a:off x="3488321" y="4599432"/>
             <a:ext cx="502920" cy="182880"/>
           </a:xfrm>
           <a:prstGeom prst="rect">
@@ -23468,7 +23500,7 @@
                 </a:solidFill>
                 <a:latin typeface="Arial"/>
               </a:rPr>
-              <a:t>57</a:t>
+              <a:t>54</a:t>
             </a:r>
             <a:endParaRPr sz="800"/>
           </a:p>
@@ -24146,7 +24178,7 @@
                           </a:solidFill>
                           <a:latin typeface="Arial"/>
                         </a:rPr>
-                        <a:t>7.52%</a:t>
+                        <a:t>7.56%</a:t>
                       </a:r>
                       <a:endParaRPr sz="900"/>
                     </a:p>
@@ -24182,7 +24214,7 @@
                           </a:solidFill>
                           <a:latin typeface="Arial"/>
                         </a:rPr>
-                        <a:t>8.02%</a:t>
+                        <a:t>8.06%</a:t>
                       </a:r>
                       <a:endParaRPr sz="900"/>
                     </a:p>
@@ -24218,7 +24250,7 @@
                           </a:solidFill>
                           <a:latin typeface="Arial"/>
                         </a:rPr>
-                        <a:t>8.52%</a:t>
+                        <a:t>8.56%</a:t>
                       </a:r>
                       <a:endParaRPr sz="900"/>
                     </a:p>
@@ -24254,7 +24286,7 @@
                           </a:solidFill>
                           <a:latin typeface="Arial"/>
                         </a:rPr>
-                        <a:t>9.02%</a:t>
+                        <a:t>9.06%</a:t>
                       </a:r>
                       <a:endParaRPr sz="900"/>
                     </a:p>
@@ -24290,7 +24322,7 @@
                           </a:solidFill>
                           <a:latin typeface="Arial"/>
                         </a:rPr>
-                        <a:t>9.52%</a:t>
+                        <a:t>9.56%</a:t>
                       </a:r>
                       <a:endParaRPr sz="900"/>
                     </a:p>
@@ -24326,7 +24358,7 @@
                           </a:solidFill>
                           <a:latin typeface="Arial"/>
                         </a:rPr>
-                        <a:t>10.02%</a:t>
+                        <a:t>10.06%</a:t>
                       </a:r>
                       <a:endParaRPr sz="900"/>
                     </a:p>
@@ -24362,7 +24394,7 @@
                           </a:solidFill>
                           <a:latin typeface="Arial"/>
                         </a:rPr>
-                        <a:t>10.52%</a:t>
+                        <a:t>10.56%</a:t>
                       </a:r>
                       <a:endParaRPr sz="900"/>
                     </a:p>
@@ -24472,7 +24504,7 @@
                           </a:solidFill>
                           <a:latin typeface="Arial"/>
                         </a:rPr>
-                        <a:t>67.2</a:t>
+                        <a:t>62.9</a:t>
                       </a:r>
                       <a:endParaRPr sz="900"/>
                     </a:p>
@@ -24506,7 +24538,7 @@
                           </a:solidFill>
                           <a:latin typeface="Arial"/>
                         </a:rPr>
-                        <a:t>61.5</a:t>
+                        <a:t>57.5</a:t>
                       </a:r>
                       <a:endParaRPr sz="900"/>
                     </a:p>
@@ -24540,7 +24572,7 @@
                           </a:solidFill>
                           <a:latin typeface="Arial"/>
                         </a:rPr>
-                        <a:t>56.5</a:t>
+                        <a:t>52.8</a:t>
                       </a:r>
                       <a:endParaRPr sz="900"/>
                     </a:p>
@@ -24574,7 +24606,7 @@
                           </a:solidFill>
                           <a:latin typeface="Arial"/>
                         </a:rPr>
-                        <a:t>52.3</a:t>
+                        <a:t>48.8</a:t>
                       </a:r>
                       <a:endParaRPr sz="900"/>
                     </a:p>
@@ -24608,7 +24640,7 @@
                           </a:solidFill>
                           <a:latin typeface="Arial"/>
                         </a:rPr>
-                        <a:t>48.5</a:t>
+                        <a:t>45.3</a:t>
                       </a:r>
                       <a:endParaRPr sz="900"/>
                     </a:p>
@@ -24642,7 +24674,7 @@
                           </a:solidFill>
                           <a:latin typeface="Arial"/>
                         </a:rPr>
-                        <a:t>45.2</a:t>
+                        <a:t>42.2</a:t>
                       </a:r>
                       <a:endParaRPr sz="900"/>
                     </a:p>
@@ -24676,7 +24708,7 @@
                           </a:solidFill>
                           <a:latin typeface="Arial"/>
                         </a:rPr>
-                        <a:t>42.3</a:t>
+                        <a:t>39.5</a:t>
                       </a:r>
                       <a:endParaRPr sz="900"/>
                     </a:p>
@@ -24775,7 +24807,7 @@
                           </a:solidFill>
                           <a:latin typeface="Arial"/>
                         </a:rPr>
-                        <a:t>69.0</a:t>
+                        <a:t>64.5</a:t>
                       </a:r>
                       <a:endParaRPr sz="900"/>
                     </a:p>
@@ -24809,7 +24841,7 @@
                           </a:solidFill>
                           <a:latin typeface="Arial"/>
                         </a:rPr>
-                        <a:t>62.9</a:t>
+                        <a:t>58.8</a:t>
                       </a:r>
                       <a:endParaRPr sz="900"/>
                     </a:p>
@@ -24843,7 +24875,7 @@
                           </a:solidFill>
                           <a:latin typeface="Arial"/>
                         </a:rPr>
-                        <a:t>57.7</a:t>
+                        <a:t>53.9</a:t>
                       </a:r>
                       <a:endParaRPr sz="900"/>
                     </a:p>
@@ -24879,7 +24911,7 @@
                           </a:solidFill>
                           <a:latin typeface="Arial"/>
                         </a:rPr>
-                        <a:t>53.2</a:t>
+                        <a:t>49.7</a:t>
                       </a:r>
                       <a:endParaRPr sz="900"/>
                     </a:p>
@@ -24915,7 +24947,7 @@
                           </a:solidFill>
                           <a:latin typeface="Arial"/>
                         </a:rPr>
-                        <a:t>49.3</a:t>
+                        <a:t>46.1</a:t>
                       </a:r>
                       <a:endParaRPr sz="900"/>
                     </a:p>
@@ -24936,40 +24968,6 @@
                     <a:solidFill>
                       <a:srgbClr val="D6E6EC"/>
                     </a:solidFill>
-                  </a:tcPr>
-                </a:tc>
-                <a:tc>
-                  <a:txBody>
-                    <a:bodyPr wrap="square"/>
-                    <a:lstStyle/>
-                    <a:p>
-                      <a:pPr algn="ctr"/>
-                      <a:r>
-                        <a:rPr sz="900" b="0" i="0">
-                          <a:solidFill>
-                            <a:srgbClr val="1F1F1F"/>
-                          </a:solidFill>
-                          <a:latin typeface="Arial"/>
-                        </a:rPr>
-                        <a:t>45.9</a:t>
-                      </a:r>
-                      <a:endParaRPr sz="900"/>
-                    </a:p>
-                  </a:txBody>
-                  <a:tcPr marL="36576" marR="36576" marT="0" marB="0" anchor="ctr">
-                    <a:lnL w="9525" cap="flat" cmpd="sng" algn="ctr">
-                      <a:noFill/>
-                    </a:lnL>
-                    <a:lnR w="9525" cap="flat" cmpd="sng" algn="ctr">
-                      <a:noFill/>
-                    </a:lnR>
-                    <a:lnT w="9525" cap="flat" cmpd="sng" algn="ctr">
-                      <a:noFill/>
-                    </a:lnT>
-                    <a:lnB w="9525" cap="flat" cmpd="sng" algn="ctr">
-                      <a:noFill/>
-                    </a:lnB>
-                    <a:noFill/>
                   </a:tcPr>
                 </a:tc>
                 <a:tc>
@@ -25006,6 +25004,40 @@
                     <a:noFill/>
                   </a:tcPr>
                 </a:tc>
+                <a:tc>
+                  <a:txBody>
+                    <a:bodyPr wrap="square"/>
+                    <a:lstStyle/>
+                    <a:p>
+                      <a:pPr algn="ctr"/>
+                      <a:r>
+                        <a:rPr sz="900" b="0" i="0">
+                          <a:solidFill>
+                            <a:srgbClr val="1F1F1F"/>
+                          </a:solidFill>
+                          <a:latin typeface="Arial"/>
+                        </a:rPr>
+                        <a:t>40.0</a:t>
+                      </a:r>
+                      <a:endParaRPr sz="900"/>
+                    </a:p>
+                  </a:txBody>
+                  <a:tcPr marL="36576" marR="36576" marT="0" marB="0" anchor="ctr">
+                    <a:lnL w="9525" cap="flat" cmpd="sng" algn="ctr">
+                      <a:noFill/>
+                    </a:lnL>
+                    <a:lnR w="9525" cap="flat" cmpd="sng" algn="ctr">
+                      <a:noFill/>
+                    </a:lnR>
+                    <a:lnT w="9525" cap="flat" cmpd="sng" algn="ctr">
+                      <a:noFill/>
+                    </a:lnT>
+                    <a:lnB w="9525" cap="flat" cmpd="sng" algn="ctr">
+                      <a:noFill/>
+                    </a:lnB>
+                    <a:noFill/>
+                  </a:tcPr>
+                </a:tc>
               </a:tr>
               <a:tr h="219456">
                 <a:tc vMerge="1">
@@ -25084,7 +25116,7 @@
                           </a:solidFill>
                           <a:latin typeface="Arial"/>
                         </a:rPr>
-                        <a:t>71.0</a:t>
+                        <a:t>66.3</a:t>
                       </a:r>
                       <a:endParaRPr sz="900"/>
                     </a:p>
@@ -25118,7 +25150,7 @@
                           </a:solidFill>
                           <a:latin typeface="Arial"/>
                         </a:rPr>
-                        <a:t>64.5</a:t>
+                        <a:t>60.3</a:t>
                       </a:r>
                       <a:endParaRPr sz="900"/>
                     </a:p>
@@ -25152,7 +25184,7 @@
                           </a:solidFill>
                           <a:latin typeface="Arial"/>
                         </a:rPr>
-                        <a:t>59.0</a:t>
+                        <a:t>55.1</a:t>
                       </a:r>
                       <a:endParaRPr sz="900"/>
                     </a:p>
@@ -25188,7 +25220,7 @@
                           </a:solidFill>
                           <a:latin typeface="Arial"/>
                         </a:rPr>
-                        <a:t>54.3</a:t>
+                        <a:t>50.7</a:t>
                       </a:r>
                       <a:endParaRPr sz="900"/>
                     </a:p>
@@ -25224,7 +25256,7 @@
                           </a:solidFill>
                           <a:latin typeface="Arial"/>
                         </a:rPr>
-                        <a:t>50.2</a:t>
+                        <a:t>46.9</a:t>
                       </a:r>
                       <a:endParaRPr sz="900"/>
                     </a:p>
@@ -25245,40 +25277,6 @@
                     <a:solidFill>
                       <a:srgbClr val="D6E6EC"/>
                     </a:solidFill>
-                  </a:tcPr>
-                </a:tc>
-                <a:tc>
-                  <a:txBody>
-                    <a:bodyPr wrap="square"/>
-                    <a:lstStyle/>
-                    <a:p>
-                      <a:pPr algn="ctr"/>
-                      <a:r>
-                        <a:rPr sz="900" b="0" i="0">
-                          <a:solidFill>
-                            <a:srgbClr val="1F1F1F"/>
-                          </a:solidFill>
-                          <a:latin typeface="Arial"/>
-                        </a:rPr>
-                        <a:t>46.6</a:t>
-                      </a:r>
-                      <a:endParaRPr sz="900"/>
-                    </a:p>
-                  </a:txBody>
-                  <a:tcPr marL="36576" marR="36576" marT="0" marB="0" anchor="ctr">
-                    <a:lnL w="9525" cap="flat" cmpd="sng" algn="ctr">
-                      <a:noFill/>
-                    </a:lnL>
-                    <a:lnR w="9525" cap="flat" cmpd="sng" algn="ctr">
-                      <a:noFill/>
-                    </a:lnR>
-                    <a:lnT w="9525" cap="flat" cmpd="sng" algn="ctr">
-                      <a:noFill/>
-                    </a:lnT>
-                    <a:lnB w="9525" cap="flat" cmpd="sng" algn="ctr">
-                      <a:noFill/>
-                    </a:lnB>
-                    <a:noFill/>
                   </a:tcPr>
                 </a:tc>
                 <a:tc>
@@ -25315,6 +25313,40 @@
                     <a:noFill/>
                   </a:tcPr>
                 </a:tc>
+                <a:tc>
+                  <a:txBody>
+                    <a:bodyPr wrap="square"/>
+                    <a:lstStyle/>
+                    <a:p>
+                      <a:pPr algn="ctr"/>
+                      <a:r>
+                        <a:rPr sz="900" b="0" i="0">
+                          <a:solidFill>
+                            <a:srgbClr val="1F1F1F"/>
+                          </a:solidFill>
+                          <a:latin typeface="Arial"/>
+                        </a:rPr>
+                        <a:t>40.6</a:t>
+                      </a:r>
+                      <a:endParaRPr sz="900"/>
+                    </a:p>
+                  </a:txBody>
+                  <a:tcPr marL="36576" marR="36576" marT="0" marB="0" anchor="ctr">
+                    <a:lnL w="9525" cap="flat" cmpd="sng" algn="ctr">
+                      <a:noFill/>
+                    </a:lnL>
+                    <a:lnR w="9525" cap="flat" cmpd="sng" algn="ctr">
+                      <a:noFill/>
+                    </a:lnR>
+                    <a:lnT w="9525" cap="flat" cmpd="sng" algn="ctr">
+                      <a:noFill/>
+                    </a:lnT>
+                    <a:lnB w="9525" cap="flat" cmpd="sng" algn="ctr">
+                      <a:noFill/>
+                    </a:lnB>
+                    <a:noFill/>
+                  </a:tcPr>
+                </a:tc>
               </a:tr>
               <a:tr h="219456">
                 <a:tc vMerge="1">
@@ -25393,7 +25425,7 @@
                           </a:solidFill>
                           <a:latin typeface="Arial"/>
                         </a:rPr>
-                        <a:t>73.1</a:t>
+                        <a:t>68.3</a:t>
                       </a:r>
                       <a:endParaRPr sz="900"/>
                     </a:p>
@@ -25427,7 +25459,7 @@
                           </a:solidFill>
                           <a:latin typeface="Arial"/>
                         </a:rPr>
-                        <a:t>66.2</a:t>
+                        <a:t>61.8</a:t>
                       </a:r>
                       <a:endParaRPr sz="900"/>
                     </a:p>
@@ -25461,7 +25493,7 @@
                           </a:solidFill>
                           <a:latin typeface="Arial"/>
                         </a:rPr>
-                        <a:t>60.3</a:t>
+                        <a:t>56.4</a:t>
                       </a:r>
                       <a:endParaRPr sz="900"/>
                     </a:p>
@@ -25497,7 +25529,7 @@
                           </a:solidFill>
                           <a:latin typeface="Arial"/>
                         </a:rPr>
-                        <a:t>55.4</a:t>
+                        <a:t>51.7</a:t>
                       </a:r>
                       <a:endParaRPr sz="900"/>
                     </a:p>
@@ -25533,7 +25565,7 @@
                           </a:solidFill>
                           <a:latin typeface="Arial"/>
                         </a:rPr>
-                        <a:t>51.1</a:t>
+                        <a:t>47.7</a:t>
                       </a:r>
                       <a:endParaRPr sz="900"/>
                     </a:p>
@@ -25569,7 +25601,7 @@
                           </a:solidFill>
                           <a:latin typeface="Arial"/>
                         </a:rPr>
-                        <a:t>47.4</a:t>
+                        <a:t>44.3</a:t>
                       </a:r>
                       <a:endParaRPr sz="900"/>
                     </a:p>
@@ -25603,7 +25635,7 @@
                           </a:solidFill>
                           <a:latin typeface="Arial"/>
                         </a:rPr>
-                        <a:t>44.1</a:t>
+                        <a:t>41.2</a:t>
                       </a:r>
                       <a:endParaRPr sz="900"/>
                     </a:p>
@@ -25702,7 +25734,7 @@
                           </a:solidFill>
                           <a:latin typeface="Arial"/>
                         </a:rPr>
-                        <a:t>75.4</a:t>
+                        <a:t>70.5</a:t>
                       </a:r>
                       <a:endParaRPr sz="900"/>
                     </a:p>
@@ -25736,7 +25768,7 @@
                           </a:solidFill>
                           <a:latin typeface="Arial"/>
                         </a:rPr>
-                        <a:t>68.0</a:t>
+                        <a:t>63.6</a:t>
                       </a:r>
                       <a:endParaRPr sz="900"/>
                     </a:p>
@@ -25770,7 +25802,7 @@
                           </a:solidFill>
                           <a:latin typeface="Arial"/>
                         </a:rPr>
-                        <a:t>61.8</a:t>
+                        <a:t>57.8</a:t>
                       </a:r>
                       <a:endParaRPr sz="900"/>
                     </a:p>
@@ -25804,7 +25836,7 @@
                           </a:solidFill>
                           <a:latin typeface="Arial"/>
                         </a:rPr>
-                        <a:t>56.6</a:t>
+                        <a:t>52.9</a:t>
                       </a:r>
                       <a:endParaRPr sz="900"/>
                     </a:p>
@@ -25838,7 +25870,7 @@
                           </a:solidFill>
                           <a:latin typeface="Arial"/>
                         </a:rPr>
-                        <a:t>52.1</a:t>
+                        <a:t>48.7</a:t>
                       </a:r>
                       <a:endParaRPr sz="900"/>
                     </a:p>
@@ -25872,7 +25904,7 @@
                           </a:solidFill>
                           <a:latin typeface="Arial"/>
                         </a:rPr>
-                        <a:t>48.2</a:t>
+                        <a:t>45.0</a:t>
                       </a:r>
                       <a:endParaRPr sz="900"/>
                     </a:p>
@@ -25906,7 +25938,7 @@
                           </a:solidFill>
                           <a:latin typeface="Arial"/>
                         </a:rPr>
-                        <a:t>44.8</a:t>
+                        <a:t>41.8</a:t>
                       </a:r>
                       <a:endParaRPr sz="900"/>
                     </a:p>
@@ -26451,7 +26483,7 @@
                           </a:solidFill>
                           <a:latin typeface="Arial"/>
                         </a:rPr>
-                        <a:t>12.7%</a:t>
+                        <a:t>12.3%</a:t>
                       </a:r>
                       <a:endParaRPr sz="850"/>
                     </a:p>
@@ -26488,7 +26520,7 @@
                           </a:solidFill>
                           <a:latin typeface="Arial"/>
                         </a:rPr>
-                        <a:t>15.6%</a:t>
+                        <a:t>15.1%</a:t>
                       </a:r>
                       <a:endParaRPr sz="850"/>
                     </a:p>
@@ -26601,7 +26633,7 @@
                           </a:solidFill>
                           <a:latin typeface="Arial"/>
                         </a:rPr>
-                        <a:t>4.8%</a:t>
+                        <a:t>4.5%</a:t>
                       </a:r>
                       <a:endParaRPr sz="850"/>
                     </a:p>
@@ -26638,7 +26670,7 @@
                           </a:solidFill>
                           <a:latin typeface="Arial"/>
                         </a:rPr>
-                        <a:t>5.4%</a:t>
+                        <a:t>5.1%</a:t>
                       </a:r>
                       <a:endParaRPr sz="850"/>
                     </a:p>
@@ -26788,7 +26820,7 @@
                           </a:solidFill>
                           <a:latin typeface="Arial"/>
                         </a:rPr>
-                        <a:t>9.0%</a:t>
+                        <a:t>9.1%</a:t>
                       </a:r>
                       <a:endParaRPr sz="850"/>
                     </a:p>
@@ -26901,7 +26933,7 @@
                 </a:solidFill>
                 <a:latin typeface="Arial"/>
               </a:rPr>
-              <a:t> the market's 2033E margin is only 0.9pp above today's and 2.9pp below ours</a:t>
+              <a:t> the market's 2033E margin is only 0.6pp above today's and 2.8pp below ours</a:t>
             </a:r>
             <a:endParaRPr sz="900"/>
           </a:p>
@@ -26924,7 +26956,7 @@
                 </a:solidFill>
                 <a:latin typeface="Arial"/>
               </a:rPr>
-              <a:t>Each 1pp of margin is worth NOK 4.1 per share</a:t>
+              <a:t>Each 1pp of margin is worth NOK 4.0 per share</a:t>
             </a:r>
             <a:r>
               <a:rPr sz="900" b="0" i="0">
@@ -27011,7 +27043,7 @@
                 </a:solidFill>
                 <a:latin typeface="Arial"/>
               </a:rPr>
-              <a:t>12.7%</a:t>
+              <a:t>12.3%</a:t>
             </a:r>
             <a:endParaRPr sz="1700"/>
           </a:p>
@@ -27083,7 +27115,7 @@
                 </a:solidFill>
                 <a:latin typeface="Arial"/>
               </a:rPr>
-              <a:t>15.6%</a:t>
+              <a:t>15.1%</a:t>
             </a:r>
             <a:endParaRPr sz="1700"/>
           </a:p>
